--- a/books/遇到未知的自己/原稿.pptx
+++ b/books/遇到未知的自己/原稿.pptx
@@ -4,10 +4,12 @@
   <p:sldMasterIdLst>
     <p:sldMasterId id="2147483648" r:id="rId1"/>
   </p:sldMasterIdLst>
+  <p:notesMasterIdLst>
+    <p:notesMasterId r:id="rId4"/>
+  </p:notesMasterIdLst>
   <p:sldIdLst>
     <p:sldId id="256" r:id="rId2"/>
     <p:sldId id="257" r:id="rId3"/>
-    <p:sldId id="258" r:id="rId4"/>
   </p:sldIdLst>
   <p:sldSz cx="12192000" cy="6858000"/>
   <p:notesSz cx="6858000" cy="9144000"/>
@@ -126,7 +128,7 @@
 </file>
 
 <file path=ppt/charts/chart1.xml><?xml version="1.0" encoding="utf-8"?>
-<c:chartSpace xmlns:c="http://schemas.openxmlformats.org/drawingml/2006/chart" xmlns:a="http://schemas.openxmlformats.org/drawingml/2006/main" xmlns:r="http://schemas.openxmlformats.org/officeDocument/2006/relationships">
+<c:chartSpace xmlns:c="http://schemas.openxmlformats.org/drawingml/2006/chart" xmlns:a="http://schemas.openxmlformats.org/drawingml/2006/main" xmlns:r="http://schemas.openxmlformats.org/officeDocument/2006/relationships" xmlns:c16r2="http://schemas.microsoft.com/office/drawing/2015/06/chart">
   <c:date1904 val="0"/>
   <c:lang val="en-US"/>
   <c:roundedCorners val="0"/>
@@ -190,6 +192,11 @@
                 </a:outerShdw>
               </a:effectLst>
             </c:spPr>
+            <c:extLst>
+              <c:ext xmlns:c16="http://schemas.microsoft.com/office/drawing/2014/chart" uri="{C3380CC4-5D6E-409C-BE32-E72D297353CC}">
+                <c16:uniqueId val="{00000001-5D88-7740-B0A6-A145033A4424}"/>
+              </c:ext>
+            </c:extLst>
           </c:dPt>
           <c:dPt>
             <c:idx val="1"/>
@@ -234,6 +241,11 @@
                 </a:outerShdw>
               </a:effectLst>
             </c:spPr>
+            <c:extLst>
+              <c:ext xmlns:c16="http://schemas.microsoft.com/office/drawing/2014/chart" uri="{C3380CC4-5D6E-409C-BE32-E72D297353CC}">
+                <c16:uniqueId val="{00000003-5D88-7740-B0A6-A145033A4424}"/>
+              </c:ext>
+            </c:extLst>
           </c:dPt>
           <c:dLbls>
             <c:spPr>
@@ -262,7 +274,7 @@
                     <a:cs typeface="+mn-cs"/>
                   </a:defRPr>
                 </a:pPr>
-                <a:endParaRPr lang="zh-CN"/>
+                <a:endParaRPr lang="en-CN"/>
               </a:p>
             </c:txPr>
             <c:showLegendKey val="0"/>
@@ -286,9 +298,7 @@
               </c:spPr>
             </c:leaderLines>
             <c:extLst>
-              <c:ext xmlns:c15="http://schemas.microsoft.com/office/drawing/2012/chart" uri="{CE6537A1-D6FC-4f65-9D91-7224C49458BB}">
-                <c15:layout/>
-              </c:ext>
+              <c:ext xmlns:c15="http://schemas.microsoft.com/office/drawing/2012/chart" uri="{CE6537A1-D6FC-4f65-9D91-7224C49458BB}"/>
             </c:extLst>
           </c:dLbls>
           <c:cat>
@@ -320,6 +330,11 @@
               </c:numCache>
             </c:numRef>
           </c:val>
+          <c:extLst>
+            <c:ext xmlns:c16="http://schemas.microsoft.com/office/drawing/2014/chart" uri="{C3380CC4-5D6E-409C-BE32-E72D297353CC}">
+              <c16:uniqueId val="{00000004-5D88-7740-B0A6-A145033A4424}"/>
+            </c:ext>
+          </c:extLst>
         </c:ser>
         <c:dLbls>
           <c:showLegendKey val="0"/>
@@ -342,7 +357,6 @@
     </c:plotArea>
     <c:legend>
       <c:legendPos val="b"/>
-      <c:layout/>
       <c:overlay val="0"/>
       <c:spPr>
         <a:noFill/>
@@ -368,7 +382,7 @@
               <a:cs typeface="+mn-cs"/>
             </a:defRPr>
           </a:pPr>
-          <a:endParaRPr lang="zh-CN"/>
+          <a:endParaRPr lang="en-CN"/>
         </a:p>
       </c:txPr>
     </c:legend>
@@ -390,7 +404,7 @@
       <a:pPr>
         <a:defRPr/>
       </a:pPr>
-      <a:endParaRPr lang="zh-CN"/>
+      <a:endParaRPr lang="en-CN"/>
     </a:p>
   </c:txPr>
   <c:externalData r:id="rId3">
@@ -953,6 +967,356 @@
 </cs:chartStyle>
 </file>
 
+<file path=ppt/notesMasters/notesMaster1.xml><?xml version="1.0" encoding="utf-8"?>
+<p:notesMaster xmlns:a="http://schemas.openxmlformats.org/drawingml/2006/main" xmlns:r="http://schemas.openxmlformats.org/officeDocument/2006/relationships" xmlns:p="http://schemas.openxmlformats.org/presentationml/2006/main">
+  <p:cSld>
+    <p:bg>
+      <p:bgRef idx="1001">
+        <a:schemeClr val="bg1"/>
+      </p:bgRef>
+    </p:bg>
+    <p:spTree>
+      <p:nvGrpSpPr>
+        <p:cNvPr id="1" name=""/>
+        <p:cNvGrpSpPr/>
+        <p:nvPr/>
+      </p:nvGrpSpPr>
+      <p:grpSpPr>
+        <a:xfrm>
+          <a:off x="0" y="0"/>
+          <a:ext cx="0" cy="0"/>
+          <a:chOff x="0" y="0"/>
+          <a:chExt cx="0" cy="0"/>
+        </a:xfrm>
+      </p:grpSpPr>
+      <p:sp>
+        <p:nvSpPr>
+          <p:cNvPr id="2" name="Header Placeholder 1"/>
+          <p:cNvSpPr>
+            <a:spLocks noGrp="1"/>
+          </p:cNvSpPr>
+          <p:nvPr>
+            <p:ph type="hdr" sz="quarter"/>
+          </p:nvPr>
+        </p:nvSpPr>
+        <p:spPr>
+          <a:xfrm>
+            <a:off x="0" y="0"/>
+            <a:ext cx="2971800" cy="458788"/>
+          </a:xfrm>
+          <a:prstGeom prst="rect">
+            <a:avLst/>
+          </a:prstGeom>
+        </p:spPr>
+        <p:txBody>
+          <a:bodyPr vert="horz" lIns="91440" tIns="45720" rIns="91440" bIns="45720" rtlCol="0"/>
+          <a:lstStyle>
+            <a:lvl1pPr algn="l">
+              <a:defRPr sz="1200"/>
+            </a:lvl1pPr>
+          </a:lstStyle>
+          <a:p>
+            <a:endParaRPr lang="en-CN"/>
+          </a:p>
+        </p:txBody>
+      </p:sp>
+      <p:sp>
+        <p:nvSpPr>
+          <p:cNvPr id="3" name="Date Placeholder 2"/>
+          <p:cNvSpPr>
+            <a:spLocks noGrp="1"/>
+          </p:cNvSpPr>
+          <p:nvPr>
+            <p:ph type="dt" idx="1"/>
+          </p:nvPr>
+        </p:nvSpPr>
+        <p:spPr>
+          <a:xfrm>
+            <a:off x="3884613" y="0"/>
+            <a:ext cx="2971800" cy="458788"/>
+          </a:xfrm>
+          <a:prstGeom prst="rect">
+            <a:avLst/>
+          </a:prstGeom>
+        </p:spPr>
+        <p:txBody>
+          <a:bodyPr vert="horz" lIns="91440" tIns="45720" rIns="91440" bIns="45720" rtlCol="0"/>
+          <a:lstStyle>
+            <a:lvl1pPr algn="r">
+              <a:defRPr sz="1200"/>
+            </a:lvl1pPr>
+          </a:lstStyle>
+          <a:p>
+            <a:fld id="{9E601C32-205B-484C-A1CA-6D5F56D4EA47}" type="datetimeFigureOut">
+              <a:rPr lang="en-CN" smtClean="0"/>
+              <a:t>2020/12/29</a:t>
+            </a:fld>
+            <a:endParaRPr lang="en-CN"/>
+          </a:p>
+        </p:txBody>
+      </p:sp>
+      <p:sp>
+        <p:nvSpPr>
+          <p:cNvPr id="4" name="Slide Image Placeholder 3"/>
+          <p:cNvSpPr>
+            <a:spLocks noGrp="1" noRot="1" noChangeAspect="1"/>
+          </p:cNvSpPr>
+          <p:nvPr>
+            <p:ph type="sldImg" idx="2"/>
+          </p:nvPr>
+        </p:nvSpPr>
+        <p:spPr>
+          <a:xfrm>
+            <a:off x="685800" y="1143000"/>
+            <a:ext cx="5486400" cy="3086100"/>
+          </a:xfrm>
+          <a:prstGeom prst="rect">
+            <a:avLst/>
+          </a:prstGeom>
+          <a:noFill/>
+          <a:ln w="12700">
+            <a:solidFill>
+              <a:prstClr val="black"/>
+            </a:solidFill>
+          </a:ln>
+        </p:spPr>
+        <p:txBody>
+          <a:bodyPr vert="horz" lIns="91440" tIns="45720" rIns="91440" bIns="45720" rtlCol="0" anchor="ctr"/>
+          <a:lstStyle/>
+          <a:p>
+            <a:endParaRPr lang="en-CN"/>
+          </a:p>
+        </p:txBody>
+      </p:sp>
+      <p:sp>
+        <p:nvSpPr>
+          <p:cNvPr id="5" name="Notes Placeholder 4"/>
+          <p:cNvSpPr>
+            <a:spLocks noGrp="1"/>
+          </p:cNvSpPr>
+          <p:nvPr>
+            <p:ph type="body" sz="quarter" idx="3"/>
+          </p:nvPr>
+        </p:nvSpPr>
+        <p:spPr>
+          <a:xfrm>
+            <a:off x="685800" y="4400550"/>
+            <a:ext cx="5486400" cy="3600450"/>
+          </a:xfrm>
+          <a:prstGeom prst="rect">
+            <a:avLst/>
+          </a:prstGeom>
+        </p:spPr>
+        <p:txBody>
+          <a:bodyPr vert="horz" lIns="91440" tIns="45720" rIns="91440" bIns="45720" rtlCol="0"/>
+          <a:lstStyle/>
+          <a:p>
+            <a:pPr lvl="0"/>
+            <a:r>
+              <a:rPr lang="en-US"/>
+              <a:t>Click to edit Master text styles</a:t>
+            </a:r>
+          </a:p>
+          <a:p>
+            <a:pPr lvl="1"/>
+            <a:r>
+              <a:rPr lang="en-US"/>
+              <a:t>Second level</a:t>
+            </a:r>
+          </a:p>
+          <a:p>
+            <a:pPr lvl="2"/>
+            <a:r>
+              <a:rPr lang="en-US"/>
+              <a:t>Third level</a:t>
+            </a:r>
+          </a:p>
+          <a:p>
+            <a:pPr lvl="3"/>
+            <a:r>
+              <a:rPr lang="en-US"/>
+              <a:t>Fourth level</a:t>
+            </a:r>
+          </a:p>
+          <a:p>
+            <a:pPr lvl="4"/>
+            <a:r>
+              <a:rPr lang="en-US"/>
+              <a:t>Fifth level</a:t>
+            </a:r>
+            <a:endParaRPr lang="en-CN"/>
+          </a:p>
+        </p:txBody>
+      </p:sp>
+      <p:sp>
+        <p:nvSpPr>
+          <p:cNvPr id="6" name="Footer Placeholder 5"/>
+          <p:cNvSpPr>
+            <a:spLocks noGrp="1"/>
+          </p:cNvSpPr>
+          <p:nvPr>
+            <p:ph type="ftr" sz="quarter" idx="4"/>
+          </p:nvPr>
+        </p:nvSpPr>
+        <p:spPr>
+          <a:xfrm>
+            <a:off x="0" y="8685213"/>
+            <a:ext cx="2971800" cy="458787"/>
+          </a:xfrm>
+          <a:prstGeom prst="rect">
+            <a:avLst/>
+          </a:prstGeom>
+        </p:spPr>
+        <p:txBody>
+          <a:bodyPr vert="horz" lIns="91440" tIns="45720" rIns="91440" bIns="45720" rtlCol="0" anchor="b"/>
+          <a:lstStyle>
+            <a:lvl1pPr algn="l">
+              <a:defRPr sz="1200"/>
+            </a:lvl1pPr>
+          </a:lstStyle>
+          <a:p>
+            <a:endParaRPr lang="en-CN"/>
+          </a:p>
+        </p:txBody>
+      </p:sp>
+      <p:sp>
+        <p:nvSpPr>
+          <p:cNvPr id="7" name="Slide Number Placeholder 6"/>
+          <p:cNvSpPr>
+            <a:spLocks noGrp="1"/>
+          </p:cNvSpPr>
+          <p:nvPr>
+            <p:ph type="sldNum" sz="quarter" idx="5"/>
+          </p:nvPr>
+        </p:nvSpPr>
+        <p:spPr>
+          <a:xfrm>
+            <a:off x="3884613" y="8685213"/>
+            <a:ext cx="2971800" cy="458787"/>
+          </a:xfrm>
+          <a:prstGeom prst="rect">
+            <a:avLst/>
+          </a:prstGeom>
+        </p:spPr>
+        <p:txBody>
+          <a:bodyPr vert="horz" lIns="91440" tIns="45720" rIns="91440" bIns="45720" rtlCol="0" anchor="b"/>
+          <a:lstStyle>
+            <a:lvl1pPr algn="r">
+              <a:defRPr sz="1200"/>
+            </a:lvl1pPr>
+          </a:lstStyle>
+          <a:p>
+            <a:fld id="{B0E4EAF6-917B-5A46-A4C8-C760E0597956}" type="slidenum">
+              <a:rPr lang="en-CN" smtClean="0"/>
+              <a:t>‹#›</a:t>
+            </a:fld>
+            <a:endParaRPr lang="en-CN"/>
+          </a:p>
+        </p:txBody>
+      </p:sp>
+    </p:spTree>
+    <p:extLst>
+      <p:ext uri="{BB962C8B-B14F-4D97-AF65-F5344CB8AC3E}">
+        <p14:creationId xmlns:p14="http://schemas.microsoft.com/office/powerpoint/2010/main" val="2693040405"/>
+      </p:ext>
+    </p:extLst>
+  </p:cSld>
+  <p:clrMap bg1="lt1" tx1="dk1" bg2="lt2" tx2="dk2" accent1="accent1" accent2="accent2" accent3="accent3" accent4="accent4" accent5="accent5" accent6="accent6" hlink="hlink" folHlink="folHlink"/>
+  <p:notesStyle>
+    <a:lvl1pPr marL="0" algn="l" defTabSz="914400" rtl="0" eaLnBrk="1" latinLnBrk="0" hangingPunct="1">
+      <a:defRPr sz="1200" kern="1200">
+        <a:solidFill>
+          <a:schemeClr val="tx1"/>
+        </a:solidFill>
+        <a:latin typeface="+mn-lt"/>
+        <a:ea typeface="+mn-ea"/>
+        <a:cs typeface="+mn-cs"/>
+      </a:defRPr>
+    </a:lvl1pPr>
+    <a:lvl2pPr marL="457200" algn="l" defTabSz="914400" rtl="0" eaLnBrk="1" latinLnBrk="0" hangingPunct="1">
+      <a:defRPr sz="1200" kern="1200">
+        <a:solidFill>
+          <a:schemeClr val="tx1"/>
+        </a:solidFill>
+        <a:latin typeface="+mn-lt"/>
+        <a:ea typeface="+mn-ea"/>
+        <a:cs typeface="+mn-cs"/>
+      </a:defRPr>
+    </a:lvl2pPr>
+    <a:lvl3pPr marL="914400" algn="l" defTabSz="914400" rtl="0" eaLnBrk="1" latinLnBrk="0" hangingPunct="1">
+      <a:defRPr sz="1200" kern="1200">
+        <a:solidFill>
+          <a:schemeClr val="tx1"/>
+        </a:solidFill>
+        <a:latin typeface="+mn-lt"/>
+        <a:ea typeface="+mn-ea"/>
+        <a:cs typeface="+mn-cs"/>
+      </a:defRPr>
+    </a:lvl3pPr>
+    <a:lvl4pPr marL="1371600" algn="l" defTabSz="914400" rtl="0" eaLnBrk="1" latinLnBrk="0" hangingPunct="1">
+      <a:defRPr sz="1200" kern="1200">
+        <a:solidFill>
+          <a:schemeClr val="tx1"/>
+        </a:solidFill>
+        <a:latin typeface="+mn-lt"/>
+        <a:ea typeface="+mn-ea"/>
+        <a:cs typeface="+mn-cs"/>
+      </a:defRPr>
+    </a:lvl4pPr>
+    <a:lvl5pPr marL="1828800" algn="l" defTabSz="914400" rtl="0" eaLnBrk="1" latinLnBrk="0" hangingPunct="1">
+      <a:defRPr sz="1200" kern="1200">
+        <a:solidFill>
+          <a:schemeClr val="tx1"/>
+        </a:solidFill>
+        <a:latin typeface="+mn-lt"/>
+        <a:ea typeface="+mn-ea"/>
+        <a:cs typeface="+mn-cs"/>
+      </a:defRPr>
+    </a:lvl5pPr>
+    <a:lvl6pPr marL="2286000" algn="l" defTabSz="914400" rtl="0" eaLnBrk="1" latinLnBrk="0" hangingPunct="1">
+      <a:defRPr sz="1200" kern="1200">
+        <a:solidFill>
+          <a:schemeClr val="tx1"/>
+        </a:solidFill>
+        <a:latin typeface="+mn-lt"/>
+        <a:ea typeface="+mn-ea"/>
+        <a:cs typeface="+mn-cs"/>
+      </a:defRPr>
+    </a:lvl6pPr>
+    <a:lvl7pPr marL="2743200" algn="l" defTabSz="914400" rtl="0" eaLnBrk="1" latinLnBrk="0" hangingPunct="1">
+      <a:defRPr sz="1200" kern="1200">
+        <a:solidFill>
+          <a:schemeClr val="tx1"/>
+        </a:solidFill>
+        <a:latin typeface="+mn-lt"/>
+        <a:ea typeface="+mn-ea"/>
+        <a:cs typeface="+mn-cs"/>
+      </a:defRPr>
+    </a:lvl7pPr>
+    <a:lvl8pPr marL="3200400" algn="l" defTabSz="914400" rtl="0" eaLnBrk="1" latinLnBrk="0" hangingPunct="1">
+      <a:defRPr sz="1200" kern="1200">
+        <a:solidFill>
+          <a:schemeClr val="tx1"/>
+        </a:solidFill>
+        <a:latin typeface="+mn-lt"/>
+        <a:ea typeface="+mn-ea"/>
+        <a:cs typeface="+mn-cs"/>
+      </a:defRPr>
+    </a:lvl8pPr>
+    <a:lvl9pPr marL="3657600" algn="l" defTabSz="914400" rtl="0" eaLnBrk="1" latinLnBrk="0" hangingPunct="1">
+      <a:defRPr sz="1200" kern="1200">
+        <a:solidFill>
+          <a:schemeClr val="tx1"/>
+        </a:solidFill>
+        <a:latin typeface="+mn-lt"/>
+        <a:ea typeface="+mn-ea"/>
+        <a:cs typeface="+mn-cs"/>
+      </a:defRPr>
+    </a:lvl9pPr>
+  </p:notesStyle>
+</p:notesMaster>
+</file>
+
 <file path=ppt/slideLayouts/slideLayout1.xml><?xml version="1.0" encoding="utf-8"?>
 <p:sldLayout xmlns:a="http://schemas.openxmlformats.org/drawingml/2006/main" xmlns:r="http://schemas.openxmlformats.org/officeDocument/2006/relationships" xmlns:p="http://schemas.openxmlformats.org/presentationml/2006/main" type="title" preserve="1">
   <p:cSld name="Title Slide">
@@ -995,7 +1359,7 @@
           </a:lstStyle>
           <a:p>
             <a:r>
-              <a:rPr lang="en-US" altLang="zh-CN" smtClean="0"/>
+              <a:rPr lang="en-US" altLang="zh-CN"/>
               <a:t>Click to edit Master title style</a:t>
             </a:r>
             <a:endParaRPr lang="zh-CN" altLang="en-US"/>
@@ -1060,7 +1424,7 @@
           </a:lstStyle>
           <a:p>
             <a:r>
-              <a:rPr lang="en-US" altLang="zh-CN" smtClean="0"/>
+              <a:rPr lang="en-US" altLang="zh-CN"/>
               <a:t>Click to edit Master subtitle style</a:t>
             </a:r>
             <a:endParaRPr lang="zh-CN" altLang="en-US"/>
@@ -1084,7 +1448,7 @@
           <a:p>
             <a:fld id="{AB513D0E-68AF-4C88-A228-DBBB4E4BDE9E}" type="datetimeFigureOut">
               <a:rPr lang="zh-CN" altLang="en-US" smtClean="0"/>
-              <a:t>2020/12/26</a:t>
+              <a:t>2020/12/29</a:t>
             </a:fld>
             <a:endParaRPr lang="zh-CN" altLang="en-US"/>
           </a:p>
@@ -1178,7 +1542,7 @@
           <a:lstStyle/>
           <a:p>
             <a:r>
-              <a:rPr lang="en-US" altLang="zh-CN" smtClean="0"/>
+              <a:rPr lang="en-US" altLang="zh-CN"/>
               <a:t>Click to edit Master title style</a:t>
             </a:r>
             <a:endParaRPr lang="zh-CN" altLang="en-US"/>
@@ -1202,35 +1566,35 @@
           <a:p>
             <a:pPr lvl="0"/>
             <a:r>
-              <a:rPr lang="en-US" altLang="zh-CN" smtClean="0"/>
+              <a:rPr lang="en-US" altLang="zh-CN"/>
               <a:t>Click to edit Master text styles</a:t>
             </a:r>
           </a:p>
           <a:p>
             <a:pPr lvl="1"/>
             <a:r>
-              <a:rPr lang="en-US" altLang="zh-CN" smtClean="0"/>
+              <a:rPr lang="en-US" altLang="zh-CN"/>
               <a:t>Second level</a:t>
             </a:r>
           </a:p>
           <a:p>
             <a:pPr lvl="2"/>
             <a:r>
-              <a:rPr lang="en-US" altLang="zh-CN" smtClean="0"/>
+              <a:rPr lang="en-US" altLang="zh-CN"/>
               <a:t>Third level</a:t>
             </a:r>
           </a:p>
           <a:p>
             <a:pPr lvl="3"/>
             <a:r>
-              <a:rPr lang="en-US" altLang="zh-CN" smtClean="0"/>
+              <a:rPr lang="en-US" altLang="zh-CN"/>
               <a:t>Fourth level</a:t>
             </a:r>
           </a:p>
           <a:p>
             <a:pPr lvl="4"/>
             <a:r>
-              <a:rPr lang="en-US" altLang="zh-CN" smtClean="0"/>
+              <a:rPr lang="en-US" altLang="zh-CN"/>
               <a:t>Fifth level</a:t>
             </a:r>
             <a:endParaRPr lang="zh-CN" altLang="en-US"/>
@@ -1254,7 +1618,7 @@
           <a:p>
             <a:fld id="{AB513D0E-68AF-4C88-A228-DBBB4E4BDE9E}" type="datetimeFigureOut">
               <a:rPr lang="zh-CN" altLang="en-US" smtClean="0"/>
-              <a:t>2020/12/26</a:t>
+              <a:t>2020/12/29</a:t>
             </a:fld>
             <a:endParaRPr lang="zh-CN" altLang="en-US"/>
           </a:p>
@@ -1353,7 +1717,7 @@
           <a:lstStyle/>
           <a:p>
             <a:r>
-              <a:rPr lang="en-US" altLang="zh-CN" smtClean="0"/>
+              <a:rPr lang="en-US" altLang="zh-CN"/>
               <a:t>Click to edit Master title style</a:t>
             </a:r>
             <a:endParaRPr lang="zh-CN" altLang="en-US"/>
@@ -1382,35 +1746,35 @@
           <a:p>
             <a:pPr lvl="0"/>
             <a:r>
-              <a:rPr lang="en-US" altLang="zh-CN" smtClean="0"/>
+              <a:rPr lang="en-US" altLang="zh-CN"/>
               <a:t>Click to edit Master text styles</a:t>
             </a:r>
           </a:p>
           <a:p>
             <a:pPr lvl="1"/>
             <a:r>
-              <a:rPr lang="en-US" altLang="zh-CN" smtClean="0"/>
+              <a:rPr lang="en-US" altLang="zh-CN"/>
               <a:t>Second level</a:t>
             </a:r>
           </a:p>
           <a:p>
             <a:pPr lvl="2"/>
             <a:r>
-              <a:rPr lang="en-US" altLang="zh-CN" smtClean="0"/>
+              <a:rPr lang="en-US" altLang="zh-CN"/>
               <a:t>Third level</a:t>
             </a:r>
           </a:p>
           <a:p>
             <a:pPr lvl="3"/>
             <a:r>
-              <a:rPr lang="en-US" altLang="zh-CN" smtClean="0"/>
+              <a:rPr lang="en-US" altLang="zh-CN"/>
               <a:t>Fourth level</a:t>
             </a:r>
           </a:p>
           <a:p>
             <a:pPr lvl="4"/>
             <a:r>
-              <a:rPr lang="en-US" altLang="zh-CN" smtClean="0"/>
+              <a:rPr lang="en-US" altLang="zh-CN"/>
               <a:t>Fifth level</a:t>
             </a:r>
             <a:endParaRPr lang="zh-CN" altLang="en-US"/>
@@ -1434,7 +1798,7 @@
           <a:p>
             <a:fld id="{AB513D0E-68AF-4C88-A228-DBBB4E4BDE9E}" type="datetimeFigureOut">
               <a:rPr lang="zh-CN" altLang="en-US" smtClean="0"/>
-              <a:t>2020/12/26</a:t>
+              <a:t>2020/12/29</a:t>
             </a:fld>
             <a:endParaRPr lang="zh-CN" altLang="en-US"/>
           </a:p>
@@ -1528,7 +1892,7 @@
           <a:lstStyle/>
           <a:p>
             <a:r>
-              <a:rPr lang="en-US" altLang="zh-CN" smtClean="0"/>
+              <a:rPr lang="en-US" altLang="zh-CN"/>
               <a:t>Click to edit Master title style</a:t>
             </a:r>
             <a:endParaRPr lang="zh-CN" altLang="en-US"/>
@@ -1552,35 +1916,35 @@
           <a:p>
             <a:pPr lvl="0"/>
             <a:r>
-              <a:rPr lang="en-US" altLang="zh-CN" smtClean="0"/>
+              <a:rPr lang="en-US" altLang="zh-CN"/>
               <a:t>Click to edit Master text styles</a:t>
             </a:r>
           </a:p>
           <a:p>
             <a:pPr lvl="1"/>
             <a:r>
-              <a:rPr lang="en-US" altLang="zh-CN" smtClean="0"/>
+              <a:rPr lang="en-US" altLang="zh-CN"/>
               <a:t>Second level</a:t>
             </a:r>
           </a:p>
           <a:p>
             <a:pPr lvl="2"/>
             <a:r>
-              <a:rPr lang="en-US" altLang="zh-CN" smtClean="0"/>
+              <a:rPr lang="en-US" altLang="zh-CN"/>
               <a:t>Third level</a:t>
             </a:r>
           </a:p>
           <a:p>
             <a:pPr lvl="3"/>
             <a:r>
-              <a:rPr lang="en-US" altLang="zh-CN" smtClean="0"/>
+              <a:rPr lang="en-US" altLang="zh-CN"/>
               <a:t>Fourth level</a:t>
             </a:r>
           </a:p>
           <a:p>
             <a:pPr lvl="4"/>
             <a:r>
-              <a:rPr lang="en-US" altLang="zh-CN" smtClean="0"/>
+              <a:rPr lang="en-US" altLang="zh-CN"/>
               <a:t>Fifth level</a:t>
             </a:r>
             <a:endParaRPr lang="zh-CN" altLang="en-US"/>
@@ -1604,7 +1968,7 @@
           <a:p>
             <a:fld id="{AB513D0E-68AF-4C88-A228-DBBB4E4BDE9E}" type="datetimeFigureOut">
               <a:rPr lang="zh-CN" altLang="en-US" smtClean="0"/>
-              <a:t>2020/12/26</a:t>
+              <a:t>2020/12/29</a:t>
             </a:fld>
             <a:endParaRPr lang="zh-CN" altLang="en-US"/>
           </a:p>
@@ -1707,7 +2071,7 @@
           </a:lstStyle>
           <a:p>
             <a:r>
-              <a:rPr lang="en-US" altLang="zh-CN" smtClean="0"/>
+              <a:rPr lang="en-US" altLang="zh-CN"/>
               <a:t>Click to edit Master title style</a:t>
             </a:r>
             <a:endParaRPr lang="zh-CN" altLang="en-US"/>
@@ -1827,7 +2191,7 @@
           <a:p>
             <a:pPr lvl="0"/>
             <a:r>
-              <a:rPr lang="en-US" altLang="zh-CN" smtClean="0"/>
+              <a:rPr lang="en-US" altLang="zh-CN"/>
               <a:t>Click to edit Master text styles</a:t>
             </a:r>
           </a:p>
@@ -1850,7 +2214,7 @@
           <a:p>
             <a:fld id="{AB513D0E-68AF-4C88-A228-DBBB4E4BDE9E}" type="datetimeFigureOut">
               <a:rPr lang="zh-CN" altLang="en-US" smtClean="0"/>
-              <a:t>2020/12/26</a:t>
+              <a:t>2020/12/29</a:t>
             </a:fld>
             <a:endParaRPr lang="zh-CN" altLang="en-US"/>
           </a:p>
@@ -1944,7 +2308,7 @@
           <a:lstStyle/>
           <a:p>
             <a:r>
-              <a:rPr lang="en-US" altLang="zh-CN" smtClean="0"/>
+              <a:rPr lang="en-US" altLang="zh-CN"/>
               <a:t>Click to edit Master title style</a:t>
             </a:r>
             <a:endParaRPr lang="zh-CN" altLang="en-US"/>
@@ -1973,35 +2337,35 @@
           <a:p>
             <a:pPr lvl="0"/>
             <a:r>
-              <a:rPr lang="en-US" altLang="zh-CN" smtClean="0"/>
+              <a:rPr lang="en-US" altLang="zh-CN"/>
               <a:t>Click to edit Master text styles</a:t>
             </a:r>
           </a:p>
           <a:p>
             <a:pPr lvl="1"/>
             <a:r>
-              <a:rPr lang="en-US" altLang="zh-CN" smtClean="0"/>
+              <a:rPr lang="en-US" altLang="zh-CN"/>
               <a:t>Second level</a:t>
             </a:r>
           </a:p>
           <a:p>
             <a:pPr lvl="2"/>
             <a:r>
-              <a:rPr lang="en-US" altLang="zh-CN" smtClean="0"/>
+              <a:rPr lang="en-US" altLang="zh-CN"/>
               <a:t>Third level</a:t>
             </a:r>
           </a:p>
           <a:p>
             <a:pPr lvl="3"/>
             <a:r>
-              <a:rPr lang="en-US" altLang="zh-CN" smtClean="0"/>
+              <a:rPr lang="en-US" altLang="zh-CN"/>
               <a:t>Fourth level</a:t>
             </a:r>
           </a:p>
           <a:p>
             <a:pPr lvl="4"/>
             <a:r>
-              <a:rPr lang="en-US" altLang="zh-CN" smtClean="0"/>
+              <a:rPr lang="en-US" altLang="zh-CN"/>
               <a:t>Fifth level</a:t>
             </a:r>
             <a:endParaRPr lang="zh-CN" altLang="en-US"/>
@@ -2030,35 +2394,35 @@
           <a:p>
             <a:pPr lvl="0"/>
             <a:r>
-              <a:rPr lang="en-US" altLang="zh-CN" smtClean="0"/>
+              <a:rPr lang="en-US" altLang="zh-CN"/>
               <a:t>Click to edit Master text styles</a:t>
             </a:r>
           </a:p>
           <a:p>
             <a:pPr lvl="1"/>
             <a:r>
-              <a:rPr lang="en-US" altLang="zh-CN" smtClean="0"/>
+              <a:rPr lang="en-US" altLang="zh-CN"/>
               <a:t>Second level</a:t>
             </a:r>
           </a:p>
           <a:p>
             <a:pPr lvl="2"/>
             <a:r>
-              <a:rPr lang="en-US" altLang="zh-CN" smtClean="0"/>
+              <a:rPr lang="en-US" altLang="zh-CN"/>
               <a:t>Third level</a:t>
             </a:r>
           </a:p>
           <a:p>
             <a:pPr lvl="3"/>
             <a:r>
-              <a:rPr lang="en-US" altLang="zh-CN" smtClean="0"/>
+              <a:rPr lang="en-US" altLang="zh-CN"/>
               <a:t>Fourth level</a:t>
             </a:r>
           </a:p>
           <a:p>
             <a:pPr lvl="4"/>
             <a:r>
-              <a:rPr lang="en-US" altLang="zh-CN" smtClean="0"/>
+              <a:rPr lang="en-US" altLang="zh-CN"/>
               <a:t>Fifth level</a:t>
             </a:r>
             <a:endParaRPr lang="zh-CN" altLang="en-US"/>
@@ -2082,7 +2446,7 @@
           <a:p>
             <a:fld id="{AB513D0E-68AF-4C88-A228-DBBB4E4BDE9E}" type="datetimeFigureOut">
               <a:rPr lang="zh-CN" altLang="en-US" smtClean="0"/>
-              <a:t>2020/12/26</a:t>
+              <a:t>2020/12/29</a:t>
             </a:fld>
             <a:endParaRPr lang="zh-CN" altLang="en-US"/>
           </a:p>
@@ -2181,7 +2545,7 @@
           <a:lstStyle/>
           <a:p>
             <a:r>
-              <a:rPr lang="en-US" altLang="zh-CN" smtClean="0"/>
+              <a:rPr lang="en-US" altLang="zh-CN"/>
               <a:t>Click to edit Master title style</a:t>
             </a:r>
             <a:endParaRPr lang="zh-CN" altLang="en-US"/>
@@ -2247,7 +2611,7 @@
           <a:p>
             <a:pPr lvl="0"/>
             <a:r>
-              <a:rPr lang="en-US" altLang="zh-CN" smtClean="0"/>
+              <a:rPr lang="en-US" altLang="zh-CN"/>
               <a:t>Click to edit Master text styles</a:t>
             </a:r>
           </a:p>
@@ -2275,35 +2639,35 @@
           <a:p>
             <a:pPr lvl="0"/>
             <a:r>
-              <a:rPr lang="en-US" altLang="zh-CN" smtClean="0"/>
+              <a:rPr lang="en-US" altLang="zh-CN"/>
               <a:t>Click to edit Master text styles</a:t>
             </a:r>
           </a:p>
           <a:p>
             <a:pPr lvl="1"/>
             <a:r>
-              <a:rPr lang="en-US" altLang="zh-CN" smtClean="0"/>
+              <a:rPr lang="en-US" altLang="zh-CN"/>
               <a:t>Second level</a:t>
             </a:r>
           </a:p>
           <a:p>
             <a:pPr lvl="2"/>
             <a:r>
-              <a:rPr lang="en-US" altLang="zh-CN" smtClean="0"/>
+              <a:rPr lang="en-US" altLang="zh-CN"/>
               <a:t>Third level</a:t>
             </a:r>
           </a:p>
           <a:p>
             <a:pPr lvl="3"/>
             <a:r>
-              <a:rPr lang="en-US" altLang="zh-CN" smtClean="0"/>
+              <a:rPr lang="en-US" altLang="zh-CN"/>
               <a:t>Fourth level</a:t>
             </a:r>
           </a:p>
           <a:p>
             <a:pPr lvl="4"/>
             <a:r>
-              <a:rPr lang="en-US" altLang="zh-CN" smtClean="0"/>
+              <a:rPr lang="en-US" altLang="zh-CN"/>
               <a:t>Fifth level</a:t>
             </a:r>
             <a:endParaRPr lang="zh-CN" altLang="en-US"/>
@@ -2369,7 +2733,7 @@
           <a:p>
             <a:pPr lvl="0"/>
             <a:r>
-              <a:rPr lang="en-US" altLang="zh-CN" smtClean="0"/>
+              <a:rPr lang="en-US" altLang="zh-CN"/>
               <a:t>Click to edit Master text styles</a:t>
             </a:r>
           </a:p>
@@ -2397,35 +2761,35 @@
           <a:p>
             <a:pPr lvl="0"/>
             <a:r>
-              <a:rPr lang="en-US" altLang="zh-CN" smtClean="0"/>
+              <a:rPr lang="en-US" altLang="zh-CN"/>
               <a:t>Click to edit Master text styles</a:t>
             </a:r>
           </a:p>
           <a:p>
             <a:pPr lvl="1"/>
             <a:r>
-              <a:rPr lang="en-US" altLang="zh-CN" smtClean="0"/>
+              <a:rPr lang="en-US" altLang="zh-CN"/>
               <a:t>Second level</a:t>
             </a:r>
           </a:p>
           <a:p>
             <a:pPr lvl="2"/>
             <a:r>
-              <a:rPr lang="en-US" altLang="zh-CN" smtClean="0"/>
+              <a:rPr lang="en-US" altLang="zh-CN"/>
               <a:t>Third level</a:t>
             </a:r>
           </a:p>
           <a:p>
             <a:pPr lvl="3"/>
             <a:r>
-              <a:rPr lang="en-US" altLang="zh-CN" smtClean="0"/>
+              <a:rPr lang="en-US" altLang="zh-CN"/>
               <a:t>Fourth level</a:t>
             </a:r>
           </a:p>
           <a:p>
             <a:pPr lvl="4"/>
             <a:r>
-              <a:rPr lang="en-US" altLang="zh-CN" smtClean="0"/>
+              <a:rPr lang="en-US" altLang="zh-CN"/>
               <a:t>Fifth level</a:t>
             </a:r>
             <a:endParaRPr lang="zh-CN" altLang="en-US"/>
@@ -2449,7 +2813,7 @@
           <a:p>
             <a:fld id="{AB513D0E-68AF-4C88-A228-DBBB4E4BDE9E}" type="datetimeFigureOut">
               <a:rPr lang="zh-CN" altLang="en-US" smtClean="0"/>
-              <a:t>2020/12/26</a:t>
+              <a:t>2020/12/29</a:t>
             </a:fld>
             <a:endParaRPr lang="zh-CN" altLang="en-US"/>
           </a:p>
@@ -2543,7 +2907,7 @@
           <a:lstStyle/>
           <a:p>
             <a:r>
-              <a:rPr lang="en-US" altLang="zh-CN" smtClean="0"/>
+              <a:rPr lang="en-US" altLang="zh-CN"/>
               <a:t>Click to edit Master title style</a:t>
             </a:r>
             <a:endParaRPr lang="zh-CN" altLang="en-US"/>
@@ -2567,7 +2931,7 @@
           <a:p>
             <a:fld id="{AB513D0E-68AF-4C88-A228-DBBB4E4BDE9E}" type="datetimeFigureOut">
               <a:rPr lang="zh-CN" altLang="en-US" smtClean="0"/>
-              <a:t>2020/12/26</a:t>
+              <a:t>2020/12/29</a:t>
             </a:fld>
             <a:endParaRPr lang="zh-CN" altLang="en-US"/>
           </a:p>
@@ -2662,7 +3026,7 @@
           <a:p>
             <a:fld id="{AB513D0E-68AF-4C88-A228-DBBB4E4BDE9E}" type="datetimeFigureOut">
               <a:rPr lang="zh-CN" altLang="en-US" smtClean="0"/>
-              <a:t>2020/12/26</a:t>
+              <a:t>2020/12/29</a:t>
             </a:fld>
             <a:endParaRPr lang="zh-CN" altLang="en-US"/>
           </a:p>
@@ -2765,7 +3129,7 @@
           </a:lstStyle>
           <a:p>
             <a:r>
-              <a:rPr lang="en-US" altLang="zh-CN" smtClean="0"/>
+              <a:rPr lang="en-US" altLang="zh-CN"/>
               <a:t>Click to edit Master title style</a:t>
             </a:r>
             <a:endParaRPr lang="zh-CN" altLang="en-US"/>
@@ -2822,35 +3186,35 @@
           <a:p>
             <a:pPr lvl="0"/>
             <a:r>
-              <a:rPr lang="en-US" altLang="zh-CN" smtClean="0"/>
+              <a:rPr lang="en-US" altLang="zh-CN"/>
               <a:t>Click to edit Master text styles</a:t>
             </a:r>
           </a:p>
           <a:p>
             <a:pPr lvl="1"/>
             <a:r>
-              <a:rPr lang="en-US" altLang="zh-CN" smtClean="0"/>
+              <a:rPr lang="en-US" altLang="zh-CN"/>
               <a:t>Second level</a:t>
             </a:r>
           </a:p>
           <a:p>
             <a:pPr lvl="2"/>
             <a:r>
-              <a:rPr lang="en-US" altLang="zh-CN" smtClean="0"/>
+              <a:rPr lang="en-US" altLang="zh-CN"/>
               <a:t>Third level</a:t>
             </a:r>
           </a:p>
           <a:p>
             <a:pPr lvl="3"/>
             <a:r>
-              <a:rPr lang="en-US" altLang="zh-CN" smtClean="0"/>
+              <a:rPr lang="en-US" altLang="zh-CN"/>
               <a:t>Fourth level</a:t>
             </a:r>
           </a:p>
           <a:p>
             <a:pPr lvl="4"/>
             <a:r>
-              <a:rPr lang="en-US" altLang="zh-CN" smtClean="0"/>
+              <a:rPr lang="en-US" altLang="zh-CN"/>
               <a:t>Fifth level</a:t>
             </a:r>
             <a:endParaRPr lang="zh-CN" altLang="en-US"/>
@@ -2916,7 +3280,7 @@
           <a:p>
             <a:pPr lvl="0"/>
             <a:r>
-              <a:rPr lang="en-US" altLang="zh-CN" smtClean="0"/>
+              <a:rPr lang="en-US" altLang="zh-CN"/>
               <a:t>Click to edit Master text styles</a:t>
             </a:r>
           </a:p>
@@ -2939,7 +3303,7 @@
           <a:p>
             <a:fld id="{AB513D0E-68AF-4C88-A228-DBBB4E4BDE9E}" type="datetimeFigureOut">
               <a:rPr lang="zh-CN" altLang="en-US" smtClean="0"/>
-              <a:t>2020/12/26</a:t>
+              <a:t>2020/12/29</a:t>
             </a:fld>
             <a:endParaRPr lang="zh-CN" altLang="en-US"/>
           </a:p>
@@ -3042,7 +3406,7 @@
           </a:lstStyle>
           <a:p>
             <a:r>
-              <a:rPr lang="en-US" altLang="zh-CN" smtClean="0"/>
+              <a:rPr lang="en-US" altLang="zh-CN"/>
               <a:t>Click to edit Master title style</a:t>
             </a:r>
             <a:endParaRPr lang="zh-CN" altLang="en-US"/>
@@ -3169,7 +3533,7 @@
           <a:p>
             <a:pPr lvl="0"/>
             <a:r>
-              <a:rPr lang="en-US" altLang="zh-CN" smtClean="0"/>
+              <a:rPr lang="en-US" altLang="zh-CN"/>
               <a:t>Click to edit Master text styles</a:t>
             </a:r>
           </a:p>
@@ -3192,7 +3556,7 @@
           <a:p>
             <a:fld id="{AB513D0E-68AF-4C88-A228-DBBB4E4BDE9E}" type="datetimeFigureOut">
               <a:rPr lang="zh-CN" altLang="en-US" smtClean="0"/>
-              <a:t>2020/12/26</a:t>
+              <a:t>2020/12/29</a:t>
             </a:fld>
             <a:endParaRPr lang="zh-CN" altLang="en-US"/>
           </a:p>
@@ -3301,7 +3665,7 @@
           <a:lstStyle/>
           <a:p>
             <a:r>
-              <a:rPr lang="en-US" altLang="zh-CN" smtClean="0"/>
+              <a:rPr lang="en-US" altLang="zh-CN"/>
               <a:t>Click to edit Master title style</a:t>
             </a:r>
             <a:endParaRPr lang="zh-CN" altLang="en-US"/>
@@ -3335,35 +3699,35 @@
           <a:p>
             <a:pPr lvl="0"/>
             <a:r>
-              <a:rPr lang="en-US" altLang="zh-CN" smtClean="0"/>
+              <a:rPr lang="en-US" altLang="zh-CN"/>
               <a:t>Click to edit Master text styles</a:t>
             </a:r>
           </a:p>
           <a:p>
             <a:pPr lvl="1"/>
             <a:r>
-              <a:rPr lang="en-US" altLang="zh-CN" smtClean="0"/>
+              <a:rPr lang="en-US" altLang="zh-CN"/>
               <a:t>Second level</a:t>
             </a:r>
           </a:p>
           <a:p>
             <a:pPr lvl="2"/>
             <a:r>
-              <a:rPr lang="en-US" altLang="zh-CN" smtClean="0"/>
+              <a:rPr lang="en-US" altLang="zh-CN"/>
               <a:t>Third level</a:t>
             </a:r>
           </a:p>
           <a:p>
             <a:pPr lvl="3"/>
             <a:r>
-              <a:rPr lang="en-US" altLang="zh-CN" smtClean="0"/>
+              <a:rPr lang="en-US" altLang="zh-CN"/>
               <a:t>Fourth level</a:t>
             </a:r>
           </a:p>
           <a:p>
             <a:pPr lvl="4"/>
             <a:r>
-              <a:rPr lang="en-US" altLang="zh-CN" smtClean="0"/>
+              <a:rPr lang="en-US" altLang="zh-CN"/>
               <a:t>Fifth level</a:t>
             </a:r>
             <a:endParaRPr lang="zh-CN" altLang="en-US"/>
@@ -3405,7 +3769,7 @@
           <a:p>
             <a:fld id="{AB513D0E-68AF-4C88-A228-DBBB4E4BDE9E}" type="datetimeFigureOut">
               <a:rPr lang="zh-CN" altLang="en-US" smtClean="0"/>
-              <a:t>2020/12/26</a:t>
+              <a:t>2020/12/29</a:t>
             </a:fld>
             <a:endParaRPr lang="zh-CN" altLang="en-US"/>
           </a:p>
@@ -3844,13 +4208,6 @@
   <p:clrMapOvr>
     <a:masterClrMapping/>
   </p:clrMapOvr>
-  <p:timing>
-    <p:tnLst>
-      <p:par>
-        <p:cTn id="1" dur="indefinite" restart="never" nodeType="tmRoot"/>
-      </p:par>
-    </p:tnLst>
-  </p:timing>
 </p:sld>
 </file>
 
@@ -3918,16 +4275,12 @@
           <a:lstStyle/>
           <a:p>
             <a:r>
-              <a:rPr lang="zh-CN" altLang="en-US" sz="1400" dirty="0" smtClean="0">
+              <a:rPr lang="zh-CN" altLang="en-US" sz="1400" dirty="0">
                 <a:latin typeface="仿宋" panose="02010609060101010101" pitchFamily="49" charset="-122"/>
                 <a:ea typeface="仿宋" panose="02010609060101010101" pitchFamily="49" charset="-122"/>
               </a:rPr>
               <a:t>朋友</a:t>
             </a:r>
-            <a:endParaRPr lang="zh-CN" altLang="en-US" sz="1400" dirty="0">
-              <a:latin typeface="仿宋" panose="02010609060101010101" pitchFamily="49" charset="-122"/>
-              <a:ea typeface="仿宋" panose="02010609060101010101" pitchFamily="49" charset="-122"/>
-            </a:endParaRPr>
           </a:p>
         </p:txBody>
       </p:sp>
@@ -4064,16 +4417,12 @@
           <a:lstStyle/>
           <a:p>
             <a:r>
-              <a:rPr lang="zh-CN" altLang="en-US" sz="1400" dirty="0" smtClean="0">
+              <a:rPr lang="zh-CN" altLang="en-US" sz="1400" dirty="0">
                 <a:latin typeface="仿宋" panose="02010609060101010101" pitchFamily="49" charset="-122"/>
                 <a:ea typeface="仿宋" panose="02010609060101010101" pitchFamily="49" charset="-122"/>
               </a:rPr>
               <a:t>配偶</a:t>
             </a:r>
-            <a:endParaRPr lang="zh-CN" altLang="en-US" sz="1400" dirty="0">
-              <a:latin typeface="仿宋" panose="02010609060101010101" pitchFamily="49" charset="-122"/>
-              <a:ea typeface="仿宋" panose="02010609060101010101" pitchFamily="49" charset="-122"/>
-            </a:endParaRPr>
           </a:p>
         </p:txBody>
       </p:sp>
@@ -4100,30 +4449,26 @@
           <a:lstStyle/>
           <a:p>
             <a:r>
-              <a:rPr lang="zh-CN" altLang="en-US" sz="1400" dirty="0" smtClean="0">
+              <a:rPr lang="zh-CN" altLang="en-US" sz="1400" dirty="0">
                 <a:latin typeface="仿宋" panose="02010609060101010101" pitchFamily="49" charset="-122"/>
                 <a:ea typeface="仿宋" panose="02010609060101010101" pitchFamily="49" charset="-122"/>
               </a:rPr>
               <a:t>真我</a:t>
             </a:r>
             <a:r>
-              <a:rPr lang="en-US" altLang="zh-CN" sz="1400" dirty="0" smtClean="0">
+              <a:rPr lang="en-US" altLang="zh-CN" sz="1400" dirty="0">
                 <a:latin typeface="仿宋" panose="02010609060101010101" pitchFamily="49" charset="-122"/>
                 <a:ea typeface="仿宋" panose="02010609060101010101" pitchFamily="49" charset="-122"/>
               </a:rPr>
               <a:t>/</a:t>
             </a:r>
             <a:r>
-              <a:rPr lang="zh-CN" altLang="en-US" sz="1400" dirty="0" smtClean="0">
+              <a:rPr lang="zh-CN" altLang="en-US" sz="1400" dirty="0">
                 <a:latin typeface="仿宋" panose="02010609060101010101" pitchFamily="49" charset="-122"/>
                 <a:ea typeface="仿宋" panose="02010609060101010101" pitchFamily="49" charset="-122"/>
               </a:rPr>
               <a:t>爱、喜悦、和平</a:t>
             </a:r>
-            <a:endParaRPr lang="zh-CN" altLang="en-US" sz="1400" dirty="0">
-              <a:latin typeface="仿宋" panose="02010609060101010101" pitchFamily="49" charset="-122"/>
-              <a:ea typeface="仿宋" panose="02010609060101010101" pitchFamily="49" charset="-122"/>
-            </a:endParaRPr>
           </a:p>
         </p:txBody>
       </p:sp>
@@ -4150,16 +4495,12 @@
           <a:lstStyle/>
           <a:p>
             <a:r>
-              <a:rPr lang="zh-CN" altLang="en-US" sz="1400" dirty="0" smtClean="0">
+              <a:rPr lang="zh-CN" altLang="en-US" sz="1400" dirty="0">
                 <a:latin typeface="仿宋" panose="02010609060101010101" pitchFamily="49" charset="-122"/>
                 <a:ea typeface="仿宋" panose="02010609060101010101" pitchFamily="49" charset="-122"/>
               </a:rPr>
               <a:t>身体</a:t>
             </a:r>
-            <a:endParaRPr lang="zh-CN" altLang="en-US" sz="1400" dirty="0">
-              <a:latin typeface="仿宋" panose="02010609060101010101" pitchFamily="49" charset="-122"/>
-              <a:ea typeface="仿宋" panose="02010609060101010101" pitchFamily="49" charset="-122"/>
-            </a:endParaRPr>
           </a:p>
         </p:txBody>
       </p:sp>
@@ -4186,16 +4527,12 @@
           <a:lstStyle/>
           <a:p>
             <a:r>
-              <a:rPr lang="zh-CN" altLang="en-US" sz="1400" dirty="0" smtClean="0">
+              <a:rPr lang="zh-CN" altLang="en-US" sz="1400" dirty="0">
                 <a:latin typeface="仿宋" panose="02010609060101010101" pitchFamily="49" charset="-122"/>
                 <a:ea typeface="仿宋" panose="02010609060101010101" pitchFamily="49" charset="-122"/>
               </a:rPr>
               <a:t>情绪</a:t>
             </a:r>
-            <a:endParaRPr lang="zh-CN" altLang="en-US" sz="1400" dirty="0">
-              <a:latin typeface="仿宋" panose="02010609060101010101" pitchFamily="49" charset="-122"/>
-              <a:ea typeface="仿宋" panose="02010609060101010101" pitchFamily="49" charset="-122"/>
-            </a:endParaRPr>
           </a:p>
         </p:txBody>
       </p:sp>
@@ -4222,16 +4559,12 @@
           <a:lstStyle/>
           <a:p>
             <a:r>
-              <a:rPr lang="zh-CN" altLang="en-US" sz="1400" dirty="0" smtClean="0">
+              <a:rPr lang="zh-CN" altLang="en-US" sz="1400" dirty="0">
                 <a:latin typeface="仿宋" panose="02010609060101010101" pitchFamily="49" charset="-122"/>
                 <a:ea typeface="仿宋" panose="02010609060101010101" pitchFamily="49" charset="-122"/>
               </a:rPr>
               <a:t>思想</a:t>
             </a:r>
-            <a:endParaRPr lang="zh-CN" altLang="en-US" sz="1400" dirty="0">
-              <a:latin typeface="仿宋" panose="02010609060101010101" pitchFamily="49" charset="-122"/>
-              <a:ea typeface="仿宋" panose="02010609060101010101" pitchFamily="49" charset="-122"/>
-            </a:endParaRPr>
           </a:p>
         </p:txBody>
       </p:sp>
@@ -4276,28 +4609,28 @@
           <a:p>
             <a:pPr algn="ctr"/>
             <a:r>
-              <a:rPr lang="zh-CN" altLang="en-US" sz="1400" dirty="0" smtClean="0">
+              <a:rPr lang="zh-CN" altLang="en-US" sz="1400" dirty="0">
                 <a:latin typeface="仿宋" panose="02010609060101010101" pitchFamily="49" charset="-122"/>
                 <a:ea typeface="仿宋" panose="02010609060101010101" pitchFamily="49" charset="-122"/>
               </a:rPr>
               <a:t>身份认同</a:t>
             </a:r>
             <a:r>
-              <a:rPr lang="en-US" altLang="zh-CN" sz="1400" dirty="0" smtClean="0">
+              <a:rPr lang="en-US" altLang="zh-CN" sz="1400" dirty="0">
                 <a:latin typeface="仿宋" panose="02010609060101010101" pitchFamily="49" charset="-122"/>
                 <a:ea typeface="仿宋" panose="02010609060101010101" pitchFamily="49" charset="-122"/>
               </a:rPr>
               <a:t>(</a:t>
             </a:r>
             <a:r>
-              <a:rPr lang="zh-CN" altLang="en-US" sz="1400" dirty="0" smtClean="0">
+              <a:rPr lang="zh-CN" altLang="en-US" sz="1400" dirty="0">
                 <a:latin typeface="仿宋" panose="02010609060101010101" pitchFamily="49" charset="-122"/>
                 <a:ea typeface="仿宋" panose="02010609060101010101" pitchFamily="49" charset="-122"/>
               </a:rPr>
               <a:t>角色扮演</a:t>
             </a:r>
             <a:r>
-              <a:rPr lang="en-US" altLang="zh-CN" sz="1400" dirty="0" smtClean="0">
+              <a:rPr lang="en-US" altLang="zh-CN" sz="1400" dirty="0">
                 <a:latin typeface="仿宋" panose="02010609060101010101" pitchFamily="49" charset="-122"/>
                 <a:ea typeface="仿宋" panose="02010609060101010101" pitchFamily="49" charset="-122"/>
               </a:rPr>
@@ -4347,16 +4680,12 @@
           <a:p>
             <a:pPr algn="ctr"/>
             <a:r>
-              <a:rPr lang="zh-CN" altLang="en-US" sz="1400" dirty="0" smtClean="0">
+              <a:rPr lang="zh-CN" altLang="en-US" sz="1400" dirty="0">
                 <a:latin typeface="仿宋" panose="02010609060101010101" pitchFamily="49" charset="-122"/>
                 <a:ea typeface="仿宋" panose="02010609060101010101" pitchFamily="49" charset="-122"/>
               </a:rPr>
               <a:t>真正的能源</a:t>
             </a:r>
-            <a:endParaRPr lang="zh-CN" altLang="en-US" sz="1400" dirty="0">
-              <a:latin typeface="仿宋" panose="02010609060101010101" pitchFamily="49" charset="-122"/>
-              <a:ea typeface="仿宋" panose="02010609060101010101" pitchFamily="49" charset="-122"/>
-            </a:endParaRPr>
           </a:p>
         </p:txBody>
       </p:sp>
@@ -4553,16 +4882,12 @@
           <a:p>
             <a:pPr algn="ctr"/>
             <a:r>
-              <a:rPr lang="zh-CN" altLang="en-US" sz="1400" dirty="0" smtClean="0">
+              <a:rPr lang="zh-CN" altLang="en-US" sz="1400" dirty="0">
                 <a:latin typeface="仿宋" panose="02010609060101010101" pitchFamily="49" charset="-122"/>
                 <a:ea typeface="仿宋" panose="02010609060101010101" pitchFamily="49" charset="-122"/>
               </a:rPr>
               <a:t>现实的能源</a:t>
             </a:r>
-            <a:endParaRPr lang="zh-CN" altLang="en-US" sz="1400" dirty="0">
-              <a:latin typeface="仿宋" panose="02010609060101010101" pitchFamily="49" charset="-122"/>
-              <a:ea typeface="仿宋" panose="02010609060101010101" pitchFamily="49" charset="-122"/>
-            </a:endParaRPr>
           </a:p>
         </p:txBody>
       </p:sp>
@@ -4723,7 +5048,7 @@
           <a:lstStyle/>
           <a:p>
             <a:r>
-              <a:rPr lang="zh-CN" altLang="en-US" sz="1400" dirty="0" smtClean="0">
+              <a:rPr lang="zh-CN" altLang="en-US" sz="1400" dirty="0">
                 <a:solidFill>
                   <a:srgbClr val="FF0000"/>
                 </a:solidFill>
@@ -4732,13 +5057,6 @@
               </a:rPr>
               <a:t>连结</a:t>
             </a:r>
-            <a:endParaRPr lang="zh-CN" altLang="en-US" sz="1400" dirty="0">
-              <a:solidFill>
-                <a:srgbClr val="FF0000"/>
-              </a:solidFill>
-              <a:latin typeface="仿宋" panose="02010609060101010101" pitchFamily="49" charset="-122"/>
-              <a:ea typeface="仿宋" panose="02010609060101010101" pitchFamily="49" charset="-122"/>
-            </a:endParaRPr>
           </a:p>
         </p:txBody>
       </p:sp>
@@ -4765,7 +5083,7 @@
           <a:lstStyle/>
           <a:p>
             <a:r>
-              <a:rPr lang="zh-CN" altLang="en-US" sz="1400" dirty="0" smtClean="0">
+              <a:rPr lang="zh-CN" altLang="en-US" sz="1400" dirty="0">
                 <a:solidFill>
                   <a:srgbClr val="FF0000"/>
                 </a:solidFill>
@@ -4774,13 +5092,6 @@
               </a:rPr>
               <a:t>臣服</a:t>
             </a:r>
-            <a:endParaRPr lang="zh-CN" altLang="en-US" sz="1400" dirty="0">
-              <a:solidFill>
-                <a:srgbClr val="FF0000"/>
-              </a:solidFill>
-              <a:latin typeface="仿宋" panose="02010609060101010101" pitchFamily="49" charset="-122"/>
-              <a:ea typeface="仿宋" panose="02010609060101010101" pitchFamily="49" charset="-122"/>
-            </a:endParaRPr>
           </a:p>
         </p:txBody>
       </p:sp>
@@ -4807,7 +5118,7 @@
           <a:lstStyle/>
           <a:p>
             <a:r>
-              <a:rPr lang="zh-CN" altLang="en-US" sz="1400" dirty="0" smtClean="0">
+              <a:rPr lang="zh-CN" altLang="en-US" sz="1400" dirty="0">
                 <a:solidFill>
                   <a:srgbClr val="FF0000"/>
                 </a:solidFill>
@@ -4816,13 +5127,6 @@
               </a:rPr>
               <a:t>宁静</a:t>
             </a:r>
-            <a:endParaRPr lang="zh-CN" altLang="en-US" sz="1400" dirty="0">
-              <a:solidFill>
-                <a:srgbClr val="FF0000"/>
-              </a:solidFill>
-              <a:latin typeface="仿宋" panose="02010609060101010101" pitchFamily="49" charset="-122"/>
-              <a:ea typeface="仿宋" panose="02010609060101010101" pitchFamily="49" charset="-122"/>
-            </a:endParaRPr>
           </a:p>
         </p:txBody>
       </p:sp>
@@ -4882,7 +5186,7 @@
           <a:lstStyle/>
           <a:p>
             <a:r>
-              <a:rPr lang="zh-CN" altLang="en-US" sz="1400" dirty="0" smtClean="0">
+              <a:rPr lang="zh-CN" altLang="en-US" sz="1400" dirty="0">
                 <a:solidFill>
                   <a:srgbClr val="FF0000"/>
                 </a:solidFill>
@@ -4891,13 +5195,6 @@
               </a:rPr>
               <a:t>察觉</a:t>
             </a:r>
-            <a:endParaRPr lang="zh-CN" altLang="en-US" sz="1400" dirty="0">
-              <a:solidFill>
-                <a:srgbClr val="FF0000"/>
-              </a:solidFill>
-              <a:latin typeface="仿宋" panose="02010609060101010101" pitchFamily="49" charset="-122"/>
-              <a:ea typeface="仿宋" panose="02010609060101010101" pitchFamily="49" charset="-122"/>
-            </a:endParaRPr>
           </a:p>
         </p:txBody>
       </p:sp>
@@ -4924,7 +5221,7 @@
           <a:lstStyle/>
           <a:p>
             <a:r>
-              <a:rPr lang="zh-CN" altLang="en-US" sz="1600" b="1" dirty="0" smtClean="0">
+              <a:rPr lang="zh-CN" altLang="en-US" sz="1600" b="1" dirty="0">
                 <a:solidFill>
                   <a:srgbClr val="7030A0"/>
                 </a:solidFill>
@@ -4934,7 +5231,7 @@
               <a:t>自我</a:t>
             </a:r>
             <a:r>
-              <a:rPr lang="en-US" altLang="zh-CN" sz="1600" b="1" dirty="0" smtClean="0">
+              <a:rPr lang="en-US" altLang="zh-CN" sz="1600" b="1" dirty="0">
                 <a:solidFill>
                   <a:srgbClr val="7030A0"/>
                 </a:solidFill>
@@ -4944,7 +5241,7 @@
               <a:t>/</a:t>
             </a:r>
             <a:r>
-              <a:rPr lang="zh-CN" altLang="en-US" sz="1600" b="1" dirty="0" smtClean="0">
+              <a:rPr lang="zh-CN" altLang="en-US" sz="1600" b="1" dirty="0">
                 <a:solidFill>
                   <a:srgbClr val="7030A0"/>
                 </a:solidFill>
@@ -4954,7 +5251,7 @@
               <a:t>小我</a:t>
             </a:r>
             <a:r>
-              <a:rPr lang="en-US" altLang="zh-CN" sz="1600" b="1" dirty="0" smtClean="0">
+              <a:rPr lang="en-US" altLang="zh-CN" sz="1600" b="1" dirty="0">
                 <a:solidFill>
                   <a:srgbClr val="7030A0"/>
                 </a:solidFill>
@@ -4987,1093 +5284,6 @@
     <p:extLst>
       <p:ext uri="{BB962C8B-B14F-4D97-AF65-F5344CB8AC3E}">
         <p14:creationId xmlns:p14="http://schemas.microsoft.com/office/powerpoint/2010/main" val="2143077260"/>
-      </p:ext>
-    </p:extLst>
-  </p:cSld>
-  <p:clrMapOvr>
-    <a:masterClrMapping/>
-  </p:clrMapOvr>
-</p:sld>
-</file>
-
-<file path=ppt/slides/slide3.xml><?xml version="1.0" encoding="utf-8"?>
-<p:sld xmlns:a="http://schemas.openxmlformats.org/drawingml/2006/main" xmlns:r="http://schemas.openxmlformats.org/officeDocument/2006/relationships" xmlns:p="http://schemas.openxmlformats.org/presentationml/2006/main">
-  <p:cSld>
-    <p:spTree>
-      <p:nvGrpSpPr>
-        <p:cNvPr id="1" name=""/>
-        <p:cNvGrpSpPr/>
-        <p:nvPr/>
-      </p:nvGrpSpPr>
-      <p:grpSpPr>
-        <a:xfrm>
-          <a:off x="0" y="0"/>
-          <a:ext cx="0" cy="0"/>
-          <a:chOff x="0" y="0"/>
-          <a:chExt cx="0" cy="0"/>
-        </a:xfrm>
-      </p:grpSpPr>
-      <p:sp>
-        <p:nvSpPr>
-          <p:cNvPr id="4" name="Rectangle 3"/>
-          <p:cNvSpPr/>
-          <p:nvPr/>
-        </p:nvSpPr>
-        <p:spPr>
-          <a:xfrm>
-            <a:off x="335360" y="548680"/>
-            <a:ext cx="4320480" cy="2880320"/>
-          </a:xfrm>
-          <a:prstGeom prst="rect">
-            <a:avLst/>
-          </a:prstGeom>
-          <a:noFill/>
-        </p:spPr>
-        <p:style>
-          <a:lnRef idx="2">
-            <a:schemeClr val="accent1">
-              <a:shade val="50000"/>
-            </a:schemeClr>
-          </a:lnRef>
-          <a:fillRef idx="1">
-            <a:schemeClr val="accent1"/>
-          </a:fillRef>
-          <a:effectRef idx="0">
-            <a:schemeClr val="accent1"/>
-          </a:effectRef>
-          <a:fontRef idx="minor">
-            <a:schemeClr val="lt1"/>
-          </a:fontRef>
-        </p:style>
-        <p:txBody>
-          <a:bodyPr rtlCol="0" anchor="ctr"/>
-          <a:lstStyle/>
-          <a:p>
-            <a:pPr algn="ctr"/>
-            <a:endParaRPr lang="zh-CN" altLang="en-US"/>
-          </a:p>
-        </p:txBody>
-      </p:sp>
-      <p:sp>
-        <p:nvSpPr>
-          <p:cNvPr id="5" name="Rectangle 4"/>
-          <p:cNvSpPr/>
-          <p:nvPr/>
-        </p:nvSpPr>
-        <p:spPr>
-          <a:xfrm>
-            <a:off x="7536160" y="548680"/>
-            <a:ext cx="4320480" cy="2880320"/>
-          </a:xfrm>
-          <a:prstGeom prst="rect">
-            <a:avLst/>
-          </a:prstGeom>
-          <a:noFill/>
-        </p:spPr>
-        <p:style>
-          <a:lnRef idx="2">
-            <a:schemeClr val="accent1">
-              <a:shade val="50000"/>
-            </a:schemeClr>
-          </a:lnRef>
-          <a:fillRef idx="1">
-            <a:schemeClr val="accent1"/>
-          </a:fillRef>
-          <a:effectRef idx="0">
-            <a:schemeClr val="accent1"/>
-          </a:effectRef>
-          <a:fontRef idx="minor">
-            <a:schemeClr val="lt1"/>
-          </a:fontRef>
-        </p:style>
-        <p:txBody>
-          <a:bodyPr rtlCol="0" anchor="ctr"/>
-          <a:lstStyle/>
-          <a:p>
-            <a:pPr algn="ctr"/>
-            <a:endParaRPr lang="zh-CN" altLang="en-US"/>
-          </a:p>
-        </p:txBody>
-      </p:sp>
-      <p:sp>
-        <p:nvSpPr>
-          <p:cNvPr id="9" name="TextBox 8"/>
-          <p:cNvSpPr txBox="1"/>
-          <p:nvPr/>
-        </p:nvSpPr>
-        <p:spPr>
-          <a:xfrm>
-            <a:off x="515380" y="1804174"/>
-            <a:ext cx="792088" cy="369332"/>
-          </a:xfrm>
-          <a:prstGeom prst="rect">
-            <a:avLst/>
-          </a:prstGeom>
-          <a:noFill/>
-          <a:ln>
-            <a:solidFill>
-              <a:schemeClr val="accent1">
-                <a:shade val="50000"/>
-              </a:schemeClr>
-            </a:solidFill>
-          </a:ln>
-        </p:spPr>
-        <p:txBody>
-          <a:bodyPr wrap="square" rtlCol="0">
-            <a:spAutoFit/>
-          </a:bodyPr>
-          <a:lstStyle/>
-          <a:p>
-            <a:r>
-              <a:rPr lang="zh-CN" altLang="en-US" dirty="0" smtClean="0"/>
-              <a:t>思想</a:t>
-            </a:r>
-            <a:endParaRPr lang="zh-CN" altLang="en-US" dirty="0"/>
-          </a:p>
-        </p:txBody>
-      </p:sp>
-      <p:sp>
-        <p:nvSpPr>
-          <p:cNvPr id="10" name="TextBox 9"/>
-          <p:cNvSpPr txBox="1"/>
-          <p:nvPr/>
-        </p:nvSpPr>
-        <p:spPr>
-          <a:xfrm>
-            <a:off x="1955540" y="1804174"/>
-            <a:ext cx="2520280" cy="369332"/>
-          </a:xfrm>
-          <a:prstGeom prst="rect">
-            <a:avLst/>
-          </a:prstGeom>
-          <a:noFill/>
-          <a:ln>
-            <a:solidFill>
-              <a:schemeClr val="accent1">
-                <a:shade val="50000"/>
-              </a:schemeClr>
-            </a:solidFill>
-          </a:ln>
-        </p:spPr>
-        <p:txBody>
-          <a:bodyPr wrap="square" rtlCol="0">
-            <a:spAutoFit/>
-          </a:bodyPr>
-          <a:lstStyle/>
-          <a:p>
-            <a:r>
-              <a:rPr lang="zh-CN" altLang="en-US" dirty="0" smtClean="0"/>
-              <a:t>   感觉                      情绪</a:t>
-            </a:r>
-            <a:endParaRPr lang="zh-CN" altLang="en-US" dirty="0"/>
-          </a:p>
-        </p:txBody>
-      </p:sp>
-      <p:cxnSp>
-        <p:nvCxnSpPr>
-          <p:cNvPr id="12" name="Straight Arrow Connector 11"/>
-          <p:cNvCxnSpPr/>
-          <p:nvPr/>
-        </p:nvCxnSpPr>
-        <p:spPr>
-          <a:xfrm>
-            <a:off x="1127448" y="1988840"/>
-            <a:ext cx="1044116" cy="0"/>
-          </a:xfrm>
-          <a:prstGeom prst="straightConnector1">
-            <a:avLst/>
-          </a:prstGeom>
-          <a:ln>
-            <a:tailEnd type="triangle"/>
-          </a:ln>
-        </p:spPr>
-        <p:style>
-          <a:lnRef idx="1">
-            <a:schemeClr val="accent1"/>
-          </a:lnRef>
-          <a:fillRef idx="0">
-            <a:schemeClr val="accent1"/>
-          </a:fillRef>
-          <a:effectRef idx="0">
-            <a:schemeClr val="accent1"/>
-          </a:effectRef>
-          <a:fontRef idx="minor">
-            <a:schemeClr val="tx1"/>
-          </a:fontRef>
-        </p:style>
-      </p:cxnSp>
-      <p:cxnSp>
-        <p:nvCxnSpPr>
-          <p:cNvPr id="19" name="Straight Arrow Connector 18"/>
-          <p:cNvCxnSpPr/>
-          <p:nvPr/>
-        </p:nvCxnSpPr>
-        <p:spPr>
-          <a:xfrm>
-            <a:off x="2747627" y="1988840"/>
-            <a:ext cx="1044117" cy="0"/>
-          </a:xfrm>
-          <a:prstGeom prst="straightConnector1">
-            <a:avLst/>
-          </a:prstGeom>
-          <a:ln>
-            <a:tailEnd type="triangle"/>
-          </a:ln>
-        </p:spPr>
-        <p:style>
-          <a:lnRef idx="1">
-            <a:schemeClr val="accent1"/>
-          </a:lnRef>
-          <a:fillRef idx="0">
-            <a:schemeClr val="accent1"/>
-          </a:fillRef>
-          <a:effectRef idx="0">
-            <a:schemeClr val="accent1"/>
-          </a:effectRef>
-          <a:fontRef idx="minor">
-            <a:schemeClr val="tx1"/>
-          </a:fontRef>
-        </p:style>
-      </p:cxnSp>
-      <p:sp>
-        <p:nvSpPr>
-          <p:cNvPr id="27" name="TextBox 26"/>
-          <p:cNvSpPr txBox="1"/>
-          <p:nvPr/>
-        </p:nvSpPr>
-        <p:spPr>
-          <a:xfrm>
-            <a:off x="9300356" y="1804174"/>
-            <a:ext cx="792088" cy="369332"/>
-          </a:xfrm>
-          <a:prstGeom prst="rect">
-            <a:avLst/>
-          </a:prstGeom>
-          <a:noFill/>
-          <a:ln>
-            <a:solidFill>
-              <a:schemeClr val="accent1">
-                <a:shade val="50000"/>
-              </a:schemeClr>
-            </a:solidFill>
-          </a:ln>
-        </p:spPr>
-        <p:txBody>
-          <a:bodyPr wrap="square" rtlCol="0">
-            <a:spAutoFit/>
-          </a:bodyPr>
-          <a:lstStyle/>
-          <a:p>
-            <a:r>
-              <a:rPr lang="zh-CN" altLang="en-US" dirty="0"/>
-              <a:t>后果</a:t>
-            </a:r>
-            <a:endParaRPr lang="en-US" altLang="zh-CN" dirty="0" smtClean="0"/>
-          </a:p>
-        </p:txBody>
-      </p:sp>
-      <p:sp>
-        <p:nvSpPr>
-          <p:cNvPr id="28" name="TextBox 27"/>
-          <p:cNvSpPr txBox="1"/>
-          <p:nvPr/>
-        </p:nvSpPr>
-        <p:spPr>
-          <a:xfrm>
-            <a:off x="8832304" y="165666"/>
-            <a:ext cx="1728192" cy="369332"/>
-          </a:xfrm>
-          <a:prstGeom prst="rect">
-            <a:avLst/>
-          </a:prstGeom>
-          <a:noFill/>
-          <a:ln>
-            <a:noFill/>
-          </a:ln>
-        </p:spPr>
-        <p:txBody>
-          <a:bodyPr wrap="square" rtlCol="0">
-            <a:spAutoFit/>
-          </a:bodyPr>
-          <a:lstStyle/>
-          <a:p>
-            <a:pPr algn="ctr"/>
-            <a:r>
-              <a:rPr lang="zh-CN" altLang="en-US" b="1" dirty="0" smtClean="0">
-                <a:solidFill>
-                  <a:srgbClr val="7030A0"/>
-                </a:solidFill>
-              </a:rPr>
-              <a:t>有形世界</a:t>
-            </a:r>
-            <a:endParaRPr lang="en-US" altLang="zh-CN" b="1" dirty="0" smtClean="0">
-              <a:solidFill>
-                <a:srgbClr val="7030A0"/>
-              </a:solidFill>
-            </a:endParaRPr>
-          </a:p>
-        </p:txBody>
-      </p:sp>
-      <p:sp>
-        <p:nvSpPr>
-          <p:cNvPr id="29" name="TextBox 28"/>
-          <p:cNvSpPr txBox="1"/>
-          <p:nvPr/>
-        </p:nvSpPr>
-        <p:spPr>
-          <a:xfrm>
-            <a:off x="8984704" y="1421160"/>
-            <a:ext cx="1728192" cy="369332"/>
-          </a:xfrm>
-          <a:prstGeom prst="rect">
-            <a:avLst/>
-          </a:prstGeom>
-          <a:noFill/>
-          <a:ln>
-            <a:noFill/>
-          </a:ln>
-        </p:spPr>
-        <p:txBody>
-          <a:bodyPr wrap="square" rtlCol="0">
-            <a:spAutoFit/>
-          </a:bodyPr>
-          <a:lstStyle/>
-          <a:p>
-            <a:pPr algn="ctr"/>
-            <a:r>
-              <a:rPr lang="zh-CN" altLang="en-US" b="1" dirty="0">
-                <a:solidFill>
-                  <a:srgbClr val="7030A0"/>
-                </a:solidFill>
-              </a:rPr>
-              <a:t>物</a:t>
-            </a:r>
-            <a:r>
-              <a:rPr lang="zh-CN" altLang="en-US" b="1" dirty="0" smtClean="0">
-                <a:solidFill>
-                  <a:srgbClr val="7030A0"/>
-                </a:solidFill>
-              </a:rPr>
-              <a:t>质层面</a:t>
-            </a:r>
-            <a:endParaRPr lang="zh-CN" altLang="en-US" b="1" dirty="0">
-              <a:solidFill>
-                <a:srgbClr val="7030A0"/>
-              </a:solidFill>
-            </a:endParaRPr>
-          </a:p>
-        </p:txBody>
-      </p:sp>
-      <p:sp>
-        <p:nvSpPr>
-          <p:cNvPr id="30" name="TextBox 29"/>
-          <p:cNvSpPr txBox="1"/>
-          <p:nvPr/>
-        </p:nvSpPr>
-        <p:spPr>
-          <a:xfrm>
-            <a:off x="1649506" y="165666"/>
-            <a:ext cx="1728192" cy="369332"/>
-          </a:xfrm>
-          <a:prstGeom prst="rect">
-            <a:avLst/>
-          </a:prstGeom>
-          <a:noFill/>
-          <a:ln>
-            <a:noFill/>
-          </a:ln>
-        </p:spPr>
-        <p:txBody>
-          <a:bodyPr wrap="square" rtlCol="0">
-            <a:spAutoFit/>
-          </a:bodyPr>
-          <a:lstStyle/>
-          <a:p>
-            <a:pPr algn="ctr"/>
-            <a:r>
-              <a:rPr lang="zh-CN" altLang="en-US" b="1" dirty="0" smtClean="0">
-                <a:solidFill>
-                  <a:srgbClr val="7030A0"/>
-                </a:solidFill>
-              </a:rPr>
-              <a:t>无形层面</a:t>
-            </a:r>
-            <a:endParaRPr lang="zh-CN" altLang="en-US" b="1" dirty="0">
-              <a:solidFill>
-                <a:srgbClr val="7030A0"/>
-              </a:solidFill>
-            </a:endParaRPr>
-          </a:p>
-        </p:txBody>
-      </p:sp>
-      <p:sp>
-        <p:nvSpPr>
-          <p:cNvPr id="31" name="TextBox 30"/>
-          <p:cNvSpPr txBox="1"/>
-          <p:nvPr/>
-        </p:nvSpPr>
-        <p:spPr>
-          <a:xfrm>
-            <a:off x="5051883" y="1804174"/>
-            <a:ext cx="1728192" cy="369332"/>
-          </a:xfrm>
-          <a:prstGeom prst="rect">
-            <a:avLst/>
-          </a:prstGeom>
-          <a:noFill/>
-          <a:ln>
-            <a:noFill/>
-          </a:ln>
-        </p:spPr>
-        <p:txBody>
-          <a:bodyPr wrap="square" rtlCol="0">
-            <a:spAutoFit/>
-          </a:bodyPr>
-          <a:lstStyle/>
-          <a:p>
-            <a:pPr algn="ctr"/>
-            <a:r>
-              <a:rPr lang="zh-CN" altLang="en-US" dirty="0" smtClean="0"/>
-              <a:t>行动</a:t>
-            </a:r>
-            <a:endParaRPr lang="zh-CN" altLang="en-US" dirty="0"/>
-          </a:p>
-        </p:txBody>
-      </p:sp>
-      <p:cxnSp>
-        <p:nvCxnSpPr>
-          <p:cNvPr id="32" name="Straight Arrow Connector 31"/>
-          <p:cNvCxnSpPr/>
-          <p:nvPr/>
-        </p:nvCxnSpPr>
-        <p:spPr>
-          <a:xfrm>
-            <a:off x="4885742" y="1988840"/>
-            <a:ext cx="634194" cy="0"/>
-          </a:xfrm>
-          <a:prstGeom prst="straightConnector1">
-            <a:avLst/>
-          </a:prstGeom>
-          <a:ln>
-            <a:tailEnd type="triangle"/>
-          </a:ln>
-        </p:spPr>
-        <p:style>
-          <a:lnRef idx="1">
-            <a:schemeClr val="accent1"/>
-          </a:lnRef>
-          <a:fillRef idx="0">
-            <a:schemeClr val="accent1"/>
-          </a:fillRef>
-          <a:effectRef idx="0">
-            <a:schemeClr val="accent1"/>
-          </a:effectRef>
-          <a:fontRef idx="minor">
-            <a:schemeClr val="tx1"/>
-          </a:fontRef>
-        </p:style>
-      </p:cxnSp>
-      <p:cxnSp>
-        <p:nvCxnSpPr>
-          <p:cNvPr id="33" name="Straight Arrow Connector 32"/>
-          <p:cNvCxnSpPr/>
-          <p:nvPr/>
-        </p:nvCxnSpPr>
-        <p:spPr>
-          <a:xfrm flipV="1">
-            <a:off x="6456038" y="1974302"/>
-            <a:ext cx="612070" cy="14538"/>
-          </a:xfrm>
-          <a:prstGeom prst="straightConnector1">
-            <a:avLst/>
-          </a:prstGeom>
-          <a:ln>
-            <a:tailEnd type="triangle"/>
-          </a:ln>
-        </p:spPr>
-        <p:style>
-          <a:lnRef idx="1">
-            <a:schemeClr val="accent1"/>
-          </a:lnRef>
-          <a:fillRef idx="0">
-            <a:schemeClr val="accent1"/>
-          </a:fillRef>
-          <a:effectRef idx="0">
-            <a:schemeClr val="accent1"/>
-          </a:effectRef>
-          <a:fontRef idx="minor">
-            <a:schemeClr val="tx1"/>
-          </a:fontRef>
-        </p:style>
-      </p:cxnSp>
-      <p:sp>
-        <p:nvSpPr>
-          <p:cNvPr id="38" name="TextBox 37"/>
-          <p:cNvSpPr txBox="1"/>
-          <p:nvPr/>
-        </p:nvSpPr>
-        <p:spPr>
-          <a:xfrm>
-            <a:off x="335360" y="1252721"/>
-            <a:ext cx="1728192" cy="369332"/>
-          </a:xfrm>
-          <a:prstGeom prst="rect">
-            <a:avLst/>
-          </a:prstGeom>
-          <a:noFill/>
-          <a:ln>
-            <a:noFill/>
-          </a:ln>
-        </p:spPr>
-        <p:txBody>
-          <a:bodyPr wrap="square" rtlCol="0">
-            <a:spAutoFit/>
-          </a:bodyPr>
-          <a:lstStyle/>
-          <a:p>
-            <a:pPr algn="ctr"/>
-            <a:r>
-              <a:rPr lang="zh-CN" altLang="en-US" b="1" dirty="0">
-                <a:solidFill>
-                  <a:srgbClr val="7030A0"/>
-                </a:solidFill>
-              </a:rPr>
-              <a:t>心灵</a:t>
-            </a:r>
-            <a:r>
-              <a:rPr lang="zh-CN" altLang="en-US" b="1" dirty="0" smtClean="0">
-                <a:solidFill>
-                  <a:srgbClr val="7030A0"/>
-                </a:solidFill>
-              </a:rPr>
-              <a:t>层面</a:t>
-            </a:r>
-            <a:endParaRPr lang="zh-CN" altLang="en-US" b="1" dirty="0">
-              <a:solidFill>
-                <a:srgbClr val="7030A0"/>
-              </a:solidFill>
-            </a:endParaRPr>
-          </a:p>
-        </p:txBody>
-      </p:sp>
-      <p:sp>
-        <p:nvSpPr>
-          <p:cNvPr id="39" name="TextBox 38"/>
-          <p:cNvSpPr txBox="1"/>
-          <p:nvPr/>
-        </p:nvSpPr>
-        <p:spPr>
-          <a:xfrm>
-            <a:off x="2351584" y="1243999"/>
-            <a:ext cx="1728192" cy="369332"/>
-          </a:xfrm>
-          <a:prstGeom prst="rect">
-            <a:avLst/>
-          </a:prstGeom>
-          <a:noFill/>
-          <a:ln>
-            <a:noFill/>
-          </a:ln>
-        </p:spPr>
-        <p:txBody>
-          <a:bodyPr wrap="square" rtlCol="0">
-            <a:spAutoFit/>
-          </a:bodyPr>
-          <a:lstStyle/>
-          <a:p>
-            <a:pPr algn="ctr"/>
-            <a:r>
-              <a:rPr lang="zh-CN" altLang="en-US" b="1" dirty="0">
-                <a:solidFill>
-                  <a:srgbClr val="7030A0"/>
-                </a:solidFill>
-              </a:rPr>
-              <a:t>心理</a:t>
-            </a:r>
-            <a:r>
-              <a:rPr lang="zh-CN" altLang="en-US" b="1" dirty="0" smtClean="0">
-                <a:solidFill>
-                  <a:srgbClr val="7030A0"/>
-                </a:solidFill>
-              </a:rPr>
-              <a:t>层面</a:t>
-            </a:r>
-            <a:endParaRPr lang="zh-CN" altLang="en-US" b="1" dirty="0">
-              <a:solidFill>
-                <a:srgbClr val="7030A0"/>
-              </a:solidFill>
-            </a:endParaRPr>
-          </a:p>
-        </p:txBody>
-      </p:sp>
-      <p:sp>
-        <p:nvSpPr>
-          <p:cNvPr id="40" name="TextBox 39"/>
-          <p:cNvSpPr txBox="1"/>
-          <p:nvPr/>
-        </p:nvSpPr>
-        <p:spPr>
-          <a:xfrm>
-            <a:off x="4329708" y="5399928"/>
-            <a:ext cx="1728192" cy="369332"/>
-          </a:xfrm>
-          <a:prstGeom prst="rect">
-            <a:avLst/>
-          </a:prstGeom>
-          <a:noFill/>
-          <a:ln>
-            <a:noFill/>
-          </a:ln>
-        </p:spPr>
-        <p:txBody>
-          <a:bodyPr wrap="square" rtlCol="0">
-            <a:spAutoFit/>
-          </a:bodyPr>
-          <a:lstStyle/>
-          <a:p>
-            <a:pPr algn="ctr"/>
-            <a:r>
-              <a:rPr lang="zh-CN" altLang="en-US" dirty="0" smtClean="0"/>
-              <a:t>震动频率</a:t>
-            </a:r>
-            <a:endParaRPr lang="zh-CN" altLang="en-US" dirty="0"/>
-          </a:p>
-        </p:txBody>
-      </p:sp>
-      <p:sp>
-        <p:nvSpPr>
-          <p:cNvPr id="41" name="TextBox 40"/>
-          <p:cNvSpPr txBox="1"/>
-          <p:nvPr/>
-        </p:nvSpPr>
-        <p:spPr>
-          <a:xfrm>
-            <a:off x="2531604" y="4185084"/>
-            <a:ext cx="1728192" cy="369332"/>
-          </a:xfrm>
-          <a:prstGeom prst="rect">
-            <a:avLst/>
-          </a:prstGeom>
-          <a:noFill/>
-          <a:ln>
-            <a:noFill/>
-          </a:ln>
-        </p:spPr>
-        <p:txBody>
-          <a:bodyPr wrap="square" rtlCol="0">
-            <a:spAutoFit/>
-          </a:bodyPr>
-          <a:lstStyle/>
-          <a:p>
-            <a:pPr algn="ctr"/>
-            <a:r>
-              <a:rPr lang="zh-CN" altLang="en-US" dirty="0" smtClean="0"/>
-              <a:t>决定</a:t>
-            </a:r>
-            <a:endParaRPr lang="zh-CN" altLang="en-US" dirty="0"/>
-          </a:p>
-        </p:txBody>
-      </p:sp>
-      <p:cxnSp>
-        <p:nvCxnSpPr>
-          <p:cNvPr id="43" name="Straight Arrow Connector 42"/>
-          <p:cNvCxnSpPr/>
-          <p:nvPr/>
-        </p:nvCxnSpPr>
-        <p:spPr>
-          <a:xfrm>
-            <a:off x="911424" y="2312876"/>
-            <a:ext cx="3744416" cy="3267654"/>
-          </a:xfrm>
-          <a:prstGeom prst="straightConnector1">
-            <a:avLst/>
-          </a:prstGeom>
-          <a:ln>
-            <a:tailEnd type="triangle"/>
-          </a:ln>
-        </p:spPr>
-        <p:style>
-          <a:lnRef idx="1">
-            <a:schemeClr val="accent1"/>
-          </a:lnRef>
-          <a:fillRef idx="0">
-            <a:schemeClr val="accent1"/>
-          </a:fillRef>
-          <a:effectRef idx="0">
-            <a:schemeClr val="accent1"/>
-          </a:effectRef>
-          <a:fontRef idx="minor">
-            <a:schemeClr val="tx1"/>
-          </a:fontRef>
-        </p:style>
-      </p:cxnSp>
-      <p:sp>
-        <p:nvSpPr>
-          <p:cNvPr id="44" name="TextBox 43"/>
-          <p:cNvSpPr txBox="1"/>
-          <p:nvPr/>
-        </p:nvSpPr>
-        <p:spPr>
-          <a:xfrm>
-            <a:off x="407368" y="2247255"/>
-            <a:ext cx="1728192" cy="246221"/>
-          </a:xfrm>
-          <a:prstGeom prst="rect">
-            <a:avLst/>
-          </a:prstGeom>
-          <a:noFill/>
-          <a:ln>
-            <a:noFill/>
-          </a:ln>
-        </p:spPr>
-        <p:txBody>
-          <a:bodyPr wrap="square" rtlCol="0">
-            <a:spAutoFit/>
-          </a:bodyPr>
-          <a:lstStyle/>
-          <a:p>
-            <a:pPr algn="ctr"/>
-            <a:r>
-              <a:rPr lang="zh-CN" altLang="en-US" sz="1000" dirty="0" smtClean="0"/>
-              <a:t>（看问题角度、所思所想等）</a:t>
-            </a:r>
-            <a:endParaRPr lang="zh-CN" altLang="en-US" sz="1000" dirty="0"/>
-          </a:p>
-        </p:txBody>
-      </p:sp>
-      <p:sp>
-        <p:nvSpPr>
-          <p:cNvPr id="45" name="Oval 44"/>
-          <p:cNvSpPr/>
-          <p:nvPr/>
-        </p:nvSpPr>
-        <p:spPr>
-          <a:xfrm>
-            <a:off x="7068108" y="5022468"/>
-            <a:ext cx="2312640" cy="1116124"/>
-          </a:xfrm>
-          <a:prstGeom prst="ellipse">
-            <a:avLst/>
-          </a:prstGeom>
-          <a:noFill/>
-        </p:spPr>
-        <p:style>
-          <a:lnRef idx="2">
-            <a:schemeClr val="accent1">
-              <a:shade val="50000"/>
-            </a:schemeClr>
-          </a:lnRef>
-          <a:fillRef idx="1">
-            <a:schemeClr val="accent1"/>
-          </a:fillRef>
-          <a:effectRef idx="0">
-            <a:schemeClr val="accent1"/>
-          </a:effectRef>
-          <a:fontRef idx="minor">
-            <a:schemeClr val="lt1"/>
-          </a:fontRef>
-        </p:style>
-        <p:txBody>
-          <a:bodyPr rtlCol="0" anchor="ctr"/>
-          <a:lstStyle/>
-          <a:p>
-            <a:pPr algn="ctr"/>
-            <a:endParaRPr lang="zh-CN" altLang="en-US"/>
-          </a:p>
-        </p:txBody>
-      </p:sp>
-      <p:sp>
-        <p:nvSpPr>
-          <p:cNvPr id="46" name="TextBox 45"/>
-          <p:cNvSpPr txBox="1"/>
-          <p:nvPr/>
-        </p:nvSpPr>
-        <p:spPr>
-          <a:xfrm>
-            <a:off x="7360332" y="5399928"/>
-            <a:ext cx="1728192" cy="369332"/>
-          </a:xfrm>
-          <a:prstGeom prst="rect">
-            <a:avLst/>
-          </a:prstGeom>
-          <a:noFill/>
-          <a:ln>
-            <a:noFill/>
-          </a:ln>
-        </p:spPr>
-        <p:txBody>
-          <a:bodyPr wrap="square" rtlCol="0">
-            <a:spAutoFit/>
-          </a:bodyPr>
-          <a:lstStyle/>
-          <a:p>
-            <a:pPr algn="ctr"/>
-            <a:r>
-              <a:rPr lang="zh-CN" altLang="en-US" dirty="0" smtClean="0"/>
-              <a:t>秘密转移物</a:t>
-            </a:r>
-            <a:endParaRPr lang="en-US" altLang="zh-CN" dirty="0" smtClean="0"/>
-          </a:p>
-        </p:txBody>
-      </p:sp>
-      <p:cxnSp>
-        <p:nvCxnSpPr>
-          <p:cNvPr id="48" name="Straight Arrow Connector 47"/>
-          <p:cNvCxnSpPr>
-            <a:stCxn id="45" idx="2"/>
-          </p:cNvCxnSpPr>
-          <p:nvPr/>
-        </p:nvCxnSpPr>
-        <p:spPr>
-          <a:xfrm flipH="1">
-            <a:off x="5807968" y="5580530"/>
-            <a:ext cx="1260140" cy="0"/>
-          </a:xfrm>
-          <a:prstGeom prst="straightConnector1">
-            <a:avLst/>
-          </a:prstGeom>
-          <a:ln>
-            <a:tailEnd type="triangle"/>
-          </a:ln>
-        </p:spPr>
-        <p:style>
-          <a:lnRef idx="1">
-            <a:schemeClr val="accent1"/>
-          </a:lnRef>
-          <a:fillRef idx="0">
-            <a:schemeClr val="accent1"/>
-          </a:fillRef>
-          <a:effectRef idx="0">
-            <a:schemeClr val="accent1"/>
-          </a:effectRef>
-          <a:fontRef idx="minor">
-            <a:schemeClr val="tx1"/>
-          </a:fontRef>
-        </p:style>
-      </p:cxnSp>
-      <p:cxnSp>
-        <p:nvCxnSpPr>
-          <p:cNvPr id="56" name="Straight Arrow Connector 55"/>
-          <p:cNvCxnSpPr>
-            <a:endCxn id="31" idx="2"/>
-          </p:cNvCxnSpPr>
-          <p:nvPr/>
-        </p:nvCxnSpPr>
-        <p:spPr>
-          <a:xfrm flipV="1">
-            <a:off x="5411924" y="2173506"/>
-            <a:ext cx="504055" cy="3127703"/>
-          </a:xfrm>
-          <a:prstGeom prst="straightConnector1">
-            <a:avLst/>
-          </a:prstGeom>
-          <a:ln>
-            <a:tailEnd type="triangle"/>
-          </a:ln>
-        </p:spPr>
-        <p:style>
-          <a:lnRef idx="1">
-            <a:schemeClr val="accent1"/>
-          </a:lnRef>
-          <a:fillRef idx="0">
-            <a:schemeClr val="accent1"/>
-          </a:fillRef>
-          <a:effectRef idx="0">
-            <a:schemeClr val="accent1"/>
-          </a:effectRef>
-          <a:fontRef idx="minor">
-            <a:schemeClr val="tx1"/>
-          </a:fontRef>
-        </p:style>
-      </p:cxnSp>
-      <p:sp>
-        <p:nvSpPr>
-          <p:cNvPr id="58" name="TextBox 57"/>
-          <p:cNvSpPr txBox="1"/>
-          <p:nvPr/>
-        </p:nvSpPr>
-        <p:spPr>
-          <a:xfrm>
-            <a:off x="5033881" y="3223891"/>
-            <a:ext cx="1728192" cy="369332"/>
-          </a:xfrm>
-          <a:prstGeom prst="rect">
-            <a:avLst/>
-          </a:prstGeom>
-          <a:noFill/>
-          <a:ln>
-            <a:noFill/>
-          </a:ln>
-        </p:spPr>
-        <p:txBody>
-          <a:bodyPr wrap="square" rtlCol="0">
-            <a:spAutoFit/>
-          </a:bodyPr>
-          <a:lstStyle/>
-          <a:p>
-            <a:pPr algn="ctr"/>
-            <a:r>
-              <a:rPr lang="zh-CN" altLang="en-US" dirty="0" smtClean="0">
-                <a:solidFill>
-                  <a:srgbClr val="FF0000"/>
-                </a:solidFill>
-              </a:rPr>
-              <a:t>吸引力法则</a:t>
-            </a:r>
-            <a:endParaRPr lang="en-US" altLang="zh-CN" dirty="0" smtClean="0">
-              <a:solidFill>
-                <a:srgbClr val="FF0000"/>
-              </a:solidFill>
-            </a:endParaRPr>
-          </a:p>
-        </p:txBody>
-      </p:sp>
-      <p:cxnSp>
-        <p:nvCxnSpPr>
-          <p:cNvPr id="59" name="Straight Arrow Connector 58"/>
-          <p:cNvCxnSpPr/>
-          <p:nvPr/>
-        </p:nvCxnSpPr>
-        <p:spPr>
-          <a:xfrm flipH="1" flipV="1">
-            <a:off x="4241792" y="2124147"/>
-            <a:ext cx="666076" cy="3177062"/>
-          </a:xfrm>
-          <a:prstGeom prst="straightConnector1">
-            <a:avLst/>
-          </a:prstGeom>
-          <a:ln>
-            <a:tailEnd type="triangle"/>
-          </a:ln>
-        </p:spPr>
-        <p:style>
-          <a:lnRef idx="1">
-            <a:schemeClr val="accent1"/>
-          </a:lnRef>
-          <a:fillRef idx="0">
-            <a:schemeClr val="accent1"/>
-          </a:fillRef>
-          <a:effectRef idx="0">
-            <a:schemeClr val="accent1"/>
-          </a:effectRef>
-          <a:fontRef idx="minor">
-            <a:schemeClr val="tx1"/>
-          </a:fontRef>
-        </p:style>
-      </p:cxnSp>
-      <p:sp>
-        <p:nvSpPr>
-          <p:cNvPr id="61" name="TextBox 60"/>
-          <p:cNvSpPr txBox="1"/>
-          <p:nvPr/>
-        </p:nvSpPr>
-        <p:spPr>
-          <a:xfrm>
-            <a:off x="3518230" y="2339399"/>
-            <a:ext cx="1728192" cy="369332"/>
-          </a:xfrm>
-          <a:prstGeom prst="rect">
-            <a:avLst/>
-          </a:prstGeom>
-          <a:noFill/>
-          <a:ln>
-            <a:noFill/>
-          </a:ln>
-        </p:spPr>
-        <p:txBody>
-          <a:bodyPr wrap="square" rtlCol="0">
-            <a:spAutoFit/>
-          </a:bodyPr>
-          <a:lstStyle/>
-          <a:p>
-            <a:pPr algn="ctr"/>
-            <a:r>
-              <a:rPr lang="zh-CN" altLang="en-US" dirty="0"/>
-              <a:t>反映</a:t>
-            </a:r>
-            <a:endParaRPr lang="en-US" altLang="zh-CN" dirty="0" smtClean="0"/>
-          </a:p>
-        </p:txBody>
-      </p:sp>
-      <p:sp>
-        <p:nvSpPr>
-          <p:cNvPr id="62" name="TextBox 61"/>
-          <p:cNvSpPr txBox="1"/>
-          <p:nvPr/>
-        </p:nvSpPr>
-        <p:spPr>
-          <a:xfrm>
-            <a:off x="4835860" y="188387"/>
-            <a:ext cx="2369489" cy="369332"/>
-          </a:xfrm>
-          <a:prstGeom prst="rect">
-            <a:avLst/>
-          </a:prstGeom>
-          <a:noFill/>
-          <a:ln>
-            <a:noFill/>
-          </a:ln>
-        </p:spPr>
-        <p:txBody>
-          <a:bodyPr wrap="square" rtlCol="0">
-            <a:spAutoFit/>
-          </a:bodyPr>
-          <a:lstStyle/>
-          <a:p>
-            <a:pPr algn="ctr"/>
-            <a:r>
-              <a:rPr lang="zh-CN" altLang="en-US" dirty="0" smtClean="0">
-                <a:solidFill>
-                  <a:srgbClr val="FF0000"/>
-                </a:solidFill>
-              </a:rPr>
-              <a:t>有形影响有形的法则</a:t>
-            </a:r>
-            <a:endParaRPr lang="en-US" altLang="zh-CN" dirty="0" smtClean="0">
-              <a:solidFill>
-                <a:srgbClr val="FF0000"/>
-              </a:solidFill>
-            </a:endParaRPr>
-          </a:p>
-        </p:txBody>
-      </p:sp>
-      <p:cxnSp>
-        <p:nvCxnSpPr>
-          <p:cNvPr id="63" name="Straight Arrow Connector 62"/>
-          <p:cNvCxnSpPr/>
-          <p:nvPr/>
-        </p:nvCxnSpPr>
-        <p:spPr>
-          <a:xfrm flipV="1">
-            <a:off x="4835860" y="605083"/>
-            <a:ext cx="2524472" cy="1768"/>
-          </a:xfrm>
-          <a:prstGeom prst="straightConnector1">
-            <a:avLst/>
-          </a:prstGeom>
-          <a:ln>
-            <a:tailEnd type="triangle"/>
-          </a:ln>
-        </p:spPr>
-        <p:style>
-          <a:lnRef idx="1">
-            <a:schemeClr val="accent1"/>
-          </a:lnRef>
-          <a:fillRef idx="0">
-            <a:schemeClr val="accent1"/>
-          </a:fillRef>
-          <a:effectRef idx="0">
-            <a:schemeClr val="accent1"/>
-          </a:effectRef>
-          <a:fontRef idx="minor">
-            <a:schemeClr val="tx1"/>
-          </a:fontRef>
-        </p:style>
-      </p:cxnSp>
-    </p:spTree>
-    <p:extLst>
-      <p:ext uri="{BB962C8B-B14F-4D97-AF65-F5344CB8AC3E}">
-        <p14:creationId xmlns:p14="http://schemas.microsoft.com/office/powerpoint/2010/main" val="3545569011"/>
       </p:ext>
     </p:extLst>
   </p:cSld>
@@ -6342,4 +5552,299 @@
     </a:ext>
   </a:extLst>
 </a:theme>
+</file>
+
+<file path=ppt/theme/theme2.xml><?xml version="1.0" encoding="utf-8"?>
+<a:theme xmlns:a="http://schemas.openxmlformats.org/drawingml/2006/main" name="Office Theme">
+  <a:themeElements>
+    <a:clrScheme name="Office">
+      <a:dk1>
+        <a:sysClr val="windowText" lastClr="000000"/>
+      </a:dk1>
+      <a:lt1>
+        <a:sysClr val="window" lastClr="FFFFFF"/>
+      </a:lt1>
+      <a:dk2>
+        <a:srgbClr val="44546A"/>
+      </a:dk2>
+      <a:lt2>
+        <a:srgbClr val="E7E6E6"/>
+      </a:lt2>
+      <a:accent1>
+        <a:srgbClr val="4472C4"/>
+      </a:accent1>
+      <a:accent2>
+        <a:srgbClr val="ED7D31"/>
+      </a:accent2>
+      <a:accent3>
+        <a:srgbClr val="A5A5A5"/>
+      </a:accent3>
+      <a:accent4>
+        <a:srgbClr val="FFC000"/>
+      </a:accent4>
+      <a:accent5>
+        <a:srgbClr val="5B9BD5"/>
+      </a:accent5>
+      <a:accent6>
+        <a:srgbClr val="70AD47"/>
+      </a:accent6>
+      <a:hlink>
+        <a:srgbClr val="0563C1"/>
+      </a:hlink>
+      <a:folHlink>
+        <a:srgbClr val="954F72"/>
+      </a:folHlink>
+    </a:clrScheme>
+    <a:fontScheme name="Office">
+      <a:majorFont>
+        <a:latin typeface="Calibri Light" panose="020F0302020204030204"/>
+        <a:ea typeface=""/>
+        <a:cs typeface=""/>
+        <a:font script="Jpan" typeface="游ゴシック Light"/>
+        <a:font script="Hang" typeface="맑은 고딕"/>
+        <a:font script="Hans" typeface="等线 Light"/>
+        <a:font script="Hant" typeface="新細明體"/>
+        <a:font script="Arab" typeface="Times New Roman"/>
+        <a:font script="Hebr" typeface="Times New Roman"/>
+        <a:font script="Thai" typeface="Angsana New"/>
+        <a:font script="Ethi" typeface="Nyala"/>
+        <a:font script="Beng" typeface="Vrinda"/>
+        <a:font script="Gujr" typeface="Shruti"/>
+        <a:font script="Khmr" typeface="MoolBoran"/>
+        <a:font script="Knda" typeface="Tunga"/>
+        <a:font script="Guru" typeface="Raavi"/>
+        <a:font script="Cans" typeface="Euphemia"/>
+        <a:font script="Cher" typeface="Plantagenet Cherokee"/>
+        <a:font script="Yiii" typeface="Microsoft Yi Baiti"/>
+        <a:font script="Tibt" typeface="Microsoft Himalaya"/>
+        <a:font script="Thaa" typeface="MV Boli"/>
+        <a:font script="Deva" typeface="Mangal"/>
+        <a:font script="Telu" typeface="Gautami"/>
+        <a:font script="Taml" typeface="Latha"/>
+        <a:font script="Syrc" typeface="Estrangelo Edessa"/>
+        <a:font script="Orya" typeface="Kalinga"/>
+        <a:font script="Mlym" typeface="Kartika"/>
+        <a:font script="Laoo" typeface="DokChampa"/>
+        <a:font script="Sinh" typeface="Iskoola Pota"/>
+        <a:font script="Mong" typeface="Mongolian Baiti"/>
+        <a:font script="Viet" typeface="Times New Roman"/>
+        <a:font script="Uigh" typeface="Microsoft Uighur"/>
+        <a:font script="Geor" typeface="Sylfaen"/>
+        <a:font script="Armn" typeface="Arial"/>
+        <a:font script="Bugi" typeface="Leelawadee UI"/>
+        <a:font script="Bopo" typeface="Microsoft JhengHei"/>
+        <a:font script="Java" typeface="Javanese Text"/>
+        <a:font script="Lisu" typeface="Segoe UI"/>
+        <a:font script="Mymr" typeface="Myanmar Text"/>
+        <a:font script="Nkoo" typeface="Ebrima"/>
+        <a:font script="Olck" typeface="Nirmala UI"/>
+        <a:font script="Osma" typeface="Ebrima"/>
+        <a:font script="Phag" typeface="Phagspa"/>
+        <a:font script="Syrn" typeface="Estrangelo Edessa"/>
+        <a:font script="Syrj" typeface="Estrangelo Edessa"/>
+        <a:font script="Syre" typeface="Estrangelo Edessa"/>
+        <a:font script="Sora" typeface="Nirmala UI"/>
+        <a:font script="Tale" typeface="Microsoft Tai Le"/>
+        <a:font script="Talu" typeface="Microsoft New Tai Lue"/>
+        <a:font script="Tfng" typeface="Ebrima"/>
+      </a:majorFont>
+      <a:minorFont>
+        <a:latin typeface="Calibri" panose="020F0502020204030204"/>
+        <a:ea typeface=""/>
+        <a:cs typeface=""/>
+        <a:font script="Jpan" typeface="游ゴシック"/>
+        <a:font script="Hang" typeface="맑은 고딕"/>
+        <a:font script="Hans" typeface="等线"/>
+        <a:font script="Hant" typeface="新細明體"/>
+        <a:font script="Arab" typeface="Arial"/>
+        <a:font script="Hebr" typeface="Arial"/>
+        <a:font script="Thai" typeface="Cordia New"/>
+        <a:font script="Ethi" typeface="Nyala"/>
+        <a:font script="Beng" typeface="Vrinda"/>
+        <a:font script="Gujr" typeface="Shruti"/>
+        <a:font script="Khmr" typeface="DaunPenh"/>
+        <a:font script="Knda" typeface="Tunga"/>
+        <a:font script="Guru" typeface="Raavi"/>
+        <a:font script="Cans" typeface="Euphemia"/>
+        <a:font script="Cher" typeface="Plantagenet Cherokee"/>
+        <a:font script="Yiii" typeface="Microsoft Yi Baiti"/>
+        <a:font script="Tibt" typeface="Microsoft Himalaya"/>
+        <a:font script="Thaa" typeface="MV Boli"/>
+        <a:font script="Deva" typeface="Mangal"/>
+        <a:font script="Telu" typeface="Gautami"/>
+        <a:font script="Taml" typeface="Latha"/>
+        <a:font script="Syrc" typeface="Estrangelo Edessa"/>
+        <a:font script="Orya" typeface="Kalinga"/>
+        <a:font script="Mlym" typeface="Kartika"/>
+        <a:font script="Laoo" typeface="DokChampa"/>
+        <a:font script="Sinh" typeface="Iskoola Pota"/>
+        <a:font script="Mong" typeface="Mongolian Baiti"/>
+        <a:font script="Viet" typeface="Arial"/>
+        <a:font script="Uigh" typeface="Microsoft Uighur"/>
+        <a:font script="Geor" typeface="Sylfaen"/>
+        <a:font script="Armn" typeface="Arial"/>
+        <a:font script="Bugi" typeface="Leelawadee UI"/>
+        <a:font script="Bopo" typeface="Microsoft JhengHei"/>
+        <a:font script="Java" typeface="Javanese Text"/>
+        <a:font script="Lisu" typeface="Segoe UI"/>
+        <a:font script="Mymr" typeface="Myanmar Text"/>
+        <a:font script="Nkoo" typeface="Ebrima"/>
+        <a:font script="Olck" typeface="Nirmala UI"/>
+        <a:font script="Osma" typeface="Ebrima"/>
+        <a:font script="Phag" typeface="Phagspa"/>
+        <a:font script="Syrn" typeface="Estrangelo Edessa"/>
+        <a:font script="Syrj" typeface="Estrangelo Edessa"/>
+        <a:font script="Syre" typeface="Estrangelo Edessa"/>
+        <a:font script="Sora" typeface="Nirmala UI"/>
+        <a:font script="Tale" typeface="Microsoft Tai Le"/>
+        <a:font script="Talu" typeface="Microsoft New Tai Lue"/>
+        <a:font script="Tfng" typeface="Ebrima"/>
+      </a:minorFont>
+    </a:fontScheme>
+    <a:fmtScheme name="Office">
+      <a:fillStyleLst>
+        <a:solidFill>
+          <a:schemeClr val="phClr"/>
+        </a:solidFill>
+        <a:gradFill rotWithShape="1">
+          <a:gsLst>
+            <a:gs pos="0">
+              <a:schemeClr val="phClr">
+                <a:lumMod val="110000"/>
+                <a:satMod val="105000"/>
+                <a:tint val="67000"/>
+              </a:schemeClr>
+            </a:gs>
+            <a:gs pos="50000">
+              <a:schemeClr val="phClr">
+                <a:lumMod val="105000"/>
+                <a:satMod val="103000"/>
+                <a:tint val="73000"/>
+              </a:schemeClr>
+            </a:gs>
+            <a:gs pos="100000">
+              <a:schemeClr val="phClr">
+                <a:lumMod val="105000"/>
+                <a:satMod val="109000"/>
+                <a:tint val="81000"/>
+              </a:schemeClr>
+            </a:gs>
+          </a:gsLst>
+          <a:lin ang="5400000" scaled="0"/>
+        </a:gradFill>
+        <a:gradFill rotWithShape="1">
+          <a:gsLst>
+            <a:gs pos="0">
+              <a:schemeClr val="phClr">
+                <a:satMod val="103000"/>
+                <a:lumMod val="102000"/>
+                <a:tint val="94000"/>
+              </a:schemeClr>
+            </a:gs>
+            <a:gs pos="50000">
+              <a:schemeClr val="phClr">
+                <a:satMod val="110000"/>
+                <a:lumMod val="100000"/>
+                <a:shade val="100000"/>
+              </a:schemeClr>
+            </a:gs>
+            <a:gs pos="100000">
+              <a:schemeClr val="phClr">
+                <a:lumMod val="99000"/>
+                <a:satMod val="120000"/>
+                <a:shade val="78000"/>
+              </a:schemeClr>
+            </a:gs>
+          </a:gsLst>
+          <a:lin ang="5400000" scaled="0"/>
+        </a:gradFill>
+      </a:fillStyleLst>
+      <a:lnStyleLst>
+        <a:ln w="6350" cap="flat" cmpd="sng" algn="ctr">
+          <a:solidFill>
+            <a:schemeClr val="phClr"/>
+          </a:solidFill>
+          <a:prstDash val="solid"/>
+          <a:miter lim="800000"/>
+        </a:ln>
+        <a:ln w="12700" cap="flat" cmpd="sng" algn="ctr">
+          <a:solidFill>
+            <a:schemeClr val="phClr"/>
+          </a:solidFill>
+          <a:prstDash val="solid"/>
+          <a:miter lim="800000"/>
+        </a:ln>
+        <a:ln w="19050" cap="flat" cmpd="sng" algn="ctr">
+          <a:solidFill>
+            <a:schemeClr val="phClr"/>
+          </a:solidFill>
+          <a:prstDash val="solid"/>
+          <a:miter lim="800000"/>
+        </a:ln>
+      </a:lnStyleLst>
+      <a:effectStyleLst>
+        <a:effectStyle>
+          <a:effectLst/>
+        </a:effectStyle>
+        <a:effectStyle>
+          <a:effectLst/>
+        </a:effectStyle>
+        <a:effectStyle>
+          <a:effectLst>
+            <a:outerShdw blurRad="57150" dist="19050" dir="5400000" algn="ctr" rotWithShape="0">
+              <a:srgbClr val="000000">
+                <a:alpha val="63000"/>
+              </a:srgbClr>
+            </a:outerShdw>
+          </a:effectLst>
+        </a:effectStyle>
+      </a:effectStyleLst>
+      <a:bgFillStyleLst>
+        <a:solidFill>
+          <a:schemeClr val="phClr"/>
+        </a:solidFill>
+        <a:solidFill>
+          <a:schemeClr val="phClr">
+            <a:tint val="95000"/>
+            <a:satMod val="170000"/>
+          </a:schemeClr>
+        </a:solidFill>
+        <a:gradFill rotWithShape="1">
+          <a:gsLst>
+            <a:gs pos="0">
+              <a:schemeClr val="phClr">
+                <a:tint val="93000"/>
+                <a:satMod val="150000"/>
+                <a:shade val="98000"/>
+                <a:lumMod val="102000"/>
+              </a:schemeClr>
+            </a:gs>
+            <a:gs pos="50000">
+              <a:schemeClr val="phClr">
+                <a:tint val="98000"/>
+                <a:satMod val="130000"/>
+                <a:shade val="90000"/>
+                <a:lumMod val="103000"/>
+              </a:schemeClr>
+            </a:gs>
+            <a:gs pos="100000">
+              <a:schemeClr val="phClr">
+                <a:shade val="63000"/>
+                <a:satMod val="120000"/>
+              </a:schemeClr>
+            </a:gs>
+          </a:gsLst>
+          <a:lin ang="5400000" scaled="0"/>
+        </a:gradFill>
+      </a:bgFillStyleLst>
+    </a:fmtScheme>
+  </a:themeElements>
+  <a:objectDefaults/>
+  <a:extraClrSchemeLst/>
+  <a:extLst>
+    <a:ext uri="{05A4C25C-085E-4340-85A3-A5531E510DB2}">
+      <thm15:themeFamily xmlns:thm15="http://schemas.microsoft.com/office/thememl/2012/main" name="Office Theme" id="{62F939B6-93AF-4DB8-9C6B-D6C7DFDC589F}" vid="{4A3C46E8-61CC-4603-A589-7422A47A8E4A}"/>
+    </a:ext>
+  </a:extLst>
+</a:theme>
 </file>